--- a/software/cpp/structural_design_patterns.pptx
+++ b/software/cpp/structural_design_patterns.pptx
@@ -769,7 +769,7 @@
   <pc:docChgLst>
     <pc:chgData name="Hasan Kurt" userId="20c1b472-0618-482e-8904-729ab0ea5f4d" providerId="ADAL" clId="{A9CB5739-A9CD-4B35-8C35-2142AABFA82E}"/>
     <pc:docChg chg="undo redo custSel addSld modSld modSection">
-      <pc:chgData name="Hasan Kurt" userId="20c1b472-0618-482e-8904-729ab0ea5f4d" providerId="ADAL" clId="{A9CB5739-A9CD-4B35-8C35-2142AABFA82E}" dt="2026-04-13T09:56:18.128" v="2529" actId="20577"/>
+      <pc:chgData name="Hasan Kurt" userId="20c1b472-0618-482e-8904-729ab0ea5f4d" providerId="ADAL" clId="{A9CB5739-A9CD-4B35-8C35-2142AABFA82E}" dt="2026-04-14T09:02:46.102" v="2532" actId="26606"/>
       <pc:docMkLst>
         <pc:docMk/>
       </pc:docMkLst>
@@ -1224,9 +1224,2311 @@
           </ac:picMkLst>
         </pc:picChg>
       </pc:sldChg>
+      <pc:sldChg chg="modSp mod">
+        <pc:chgData name="Hasan Kurt" userId="20c1b472-0618-482e-8904-729ab0ea5f4d" providerId="ADAL" clId="{A9CB5739-A9CD-4B35-8C35-2142AABFA82E}" dt="2026-04-14T09:02:27.713" v="2531" actId="20577"/>
+        <pc:sldMkLst>
+          <pc:docMk/>
+          <pc:sldMk cId="266324627" sldId="563"/>
+        </pc:sldMkLst>
+        <pc:spChg chg="mod">
+          <ac:chgData name="Hasan Kurt" userId="20c1b472-0618-482e-8904-729ab0ea5f4d" providerId="ADAL" clId="{A9CB5739-A9CD-4B35-8C35-2142AABFA82E}" dt="2026-04-14T09:02:27.713" v="2531" actId="20577"/>
+          <ac:spMkLst>
+            <pc:docMk/>
+            <pc:sldMk cId="266324627" sldId="563"/>
+            <ac:spMk id="2" creationId="{44A37F04-44CE-473F-0F90-8E0663262F7E}"/>
+          </ac:spMkLst>
+        </pc:spChg>
+      </pc:sldChg>
+      <pc:sldChg chg="addSp delSp modSp mod modClrScheme chgLayout">
+        <pc:chgData name="Hasan Kurt" userId="20c1b472-0618-482e-8904-729ab0ea5f4d" providerId="ADAL" clId="{A9CB5739-A9CD-4B35-8C35-2142AABFA82E}" dt="2026-04-14T09:02:46.102" v="2532" actId="26606"/>
+        <pc:sldMkLst>
+          <pc:docMk/>
+          <pc:sldMk cId="2915483252" sldId="567"/>
+        </pc:sldMkLst>
+        <pc:spChg chg="mod">
+          <ac:chgData name="Hasan Kurt" userId="20c1b472-0618-482e-8904-729ab0ea5f4d" providerId="ADAL" clId="{A9CB5739-A9CD-4B35-8C35-2142AABFA82E}" dt="2026-04-14T09:02:46.102" v="2532" actId="26606"/>
+          <ac:spMkLst>
+            <pc:docMk/>
+            <pc:sldMk cId="2915483252" sldId="567"/>
+            <ac:spMk id="2" creationId="{479BFE87-29A2-EB63-FB4A-79220C9A9635}"/>
+          </ac:spMkLst>
+        </pc:spChg>
+        <pc:spChg chg="del">
+          <ac:chgData name="Hasan Kurt" userId="20c1b472-0618-482e-8904-729ab0ea5f4d" providerId="ADAL" clId="{A9CB5739-A9CD-4B35-8C35-2142AABFA82E}" dt="2026-04-14T09:02:46.102" v="2532" actId="26606"/>
+          <ac:spMkLst>
+            <pc:docMk/>
+            <pc:sldMk cId="2915483252" sldId="567"/>
+            <ac:spMk id="3" creationId="{4CDF2244-03DA-D8A8-48DD-5966848ADC28}"/>
+          </ac:spMkLst>
+        </pc:spChg>
+        <pc:graphicFrameChg chg="add mod">
+          <ac:chgData name="Hasan Kurt" userId="20c1b472-0618-482e-8904-729ab0ea5f4d" providerId="ADAL" clId="{A9CB5739-A9CD-4B35-8C35-2142AABFA82E}" dt="2026-04-14T09:02:46.102" v="2532" actId="26606"/>
+          <ac:graphicFrameMkLst>
+            <pc:docMk/>
+            <pc:sldMk cId="2915483252" sldId="567"/>
+            <ac:graphicFrameMk id="5" creationId="{A6A10956-DE85-423A-15F9-3ED2E8F03AAF}"/>
+          </ac:graphicFrameMkLst>
+        </pc:graphicFrameChg>
+      </pc:sldChg>
     </pc:docChg>
   </pc:docChgLst>
 </pc:chgInfo>
+</file>
+
+<file path=ppt/diagrams/colors1.xml><?xml version="1.0" encoding="utf-8"?>
+<dgm:colorsDef xmlns:dgm="http://schemas.openxmlformats.org/drawingml/2006/diagram" xmlns:a="http://schemas.openxmlformats.org/drawingml/2006/main" uniqueId="urn:microsoft.com/office/officeart/2005/8/colors/accent1_2">
+  <dgm:title val=""/>
+  <dgm:desc val=""/>
+  <dgm:catLst>
+    <dgm:cat type="accent1" pri="11200"/>
+  </dgm:catLst>
+  <dgm:styleLbl name="node0">
+    <dgm:fillClrLst meth="repeat">
+      <a:schemeClr val="accent1"/>
+    </dgm:fillClrLst>
+    <dgm:linClrLst meth="repeat">
+      <a:schemeClr val="lt1"/>
+    </dgm:linClrLst>
+    <dgm:effectClrLst/>
+    <dgm:txLinClrLst/>
+    <dgm:txFillClrLst/>
+    <dgm:txEffectClrLst/>
+  </dgm:styleLbl>
+  <dgm:styleLbl name="alignNode1">
+    <dgm:fillClrLst meth="repeat">
+      <a:schemeClr val="accent1"/>
+    </dgm:fillClrLst>
+    <dgm:linClrLst meth="repeat">
+      <a:schemeClr val="accent1"/>
+    </dgm:linClrLst>
+    <dgm:effectClrLst/>
+    <dgm:txLinClrLst/>
+    <dgm:txFillClrLst/>
+    <dgm:txEffectClrLst/>
+  </dgm:styleLbl>
+  <dgm:styleLbl name="node1">
+    <dgm:fillClrLst meth="repeat">
+      <a:schemeClr val="accent1"/>
+    </dgm:fillClrLst>
+    <dgm:linClrLst meth="repeat">
+      <a:schemeClr val="lt1"/>
+    </dgm:linClrLst>
+    <dgm:effectClrLst/>
+    <dgm:txLinClrLst/>
+    <dgm:txFillClrLst/>
+    <dgm:txEffectClrLst/>
+  </dgm:styleLbl>
+  <dgm:styleLbl name="lnNode1">
+    <dgm:fillClrLst meth="repeat">
+      <a:schemeClr val="accent1"/>
+    </dgm:fillClrLst>
+    <dgm:linClrLst meth="repeat">
+      <a:schemeClr val="lt1"/>
+    </dgm:linClrLst>
+    <dgm:effectClrLst/>
+    <dgm:txLinClrLst/>
+    <dgm:txFillClrLst/>
+    <dgm:txEffectClrLst/>
+  </dgm:styleLbl>
+  <dgm:styleLbl name="vennNode1">
+    <dgm:fillClrLst meth="repeat">
+      <a:schemeClr val="accent1">
+        <a:alpha val="50000"/>
+      </a:schemeClr>
+    </dgm:fillClrLst>
+    <dgm:linClrLst meth="repeat">
+      <a:schemeClr val="lt1"/>
+    </dgm:linClrLst>
+    <dgm:effectClrLst/>
+    <dgm:txLinClrLst/>
+    <dgm:txFillClrLst/>
+    <dgm:txEffectClrLst/>
+  </dgm:styleLbl>
+  <dgm:styleLbl name="node2">
+    <dgm:fillClrLst meth="repeat">
+      <a:schemeClr val="accent1"/>
+    </dgm:fillClrLst>
+    <dgm:linClrLst meth="repeat">
+      <a:schemeClr val="lt1"/>
+    </dgm:linClrLst>
+    <dgm:effectClrLst/>
+    <dgm:txLinClrLst/>
+    <dgm:txFillClrLst/>
+    <dgm:txEffectClrLst/>
+  </dgm:styleLbl>
+  <dgm:styleLbl name="node3">
+    <dgm:fillClrLst meth="repeat">
+      <a:schemeClr val="accent1"/>
+    </dgm:fillClrLst>
+    <dgm:linClrLst meth="repeat">
+      <a:schemeClr val="lt1"/>
+    </dgm:linClrLst>
+    <dgm:effectClrLst/>
+    <dgm:txLinClrLst/>
+    <dgm:txFillClrLst/>
+    <dgm:txEffectClrLst/>
+  </dgm:styleLbl>
+  <dgm:styleLbl name="node4">
+    <dgm:fillClrLst meth="repeat">
+      <a:schemeClr val="accent1"/>
+    </dgm:fillClrLst>
+    <dgm:linClrLst meth="repeat">
+      <a:schemeClr val="lt1"/>
+    </dgm:linClrLst>
+    <dgm:effectClrLst/>
+    <dgm:txLinClrLst/>
+    <dgm:txFillClrLst/>
+    <dgm:txEffectClrLst/>
+  </dgm:styleLbl>
+  <dgm:styleLbl name="fgImgPlace1">
+    <dgm:fillClrLst meth="repeat">
+      <a:schemeClr val="accent1">
+        <a:tint val="50000"/>
+      </a:schemeClr>
+    </dgm:fillClrLst>
+    <dgm:linClrLst meth="repeat">
+      <a:schemeClr val="lt1"/>
+    </dgm:linClrLst>
+    <dgm:effectClrLst/>
+    <dgm:txLinClrLst/>
+    <dgm:txFillClrLst meth="repeat">
+      <a:schemeClr val="lt1"/>
+    </dgm:txFillClrLst>
+    <dgm:txEffectClrLst/>
+  </dgm:styleLbl>
+  <dgm:styleLbl name="alignImgPlace1">
+    <dgm:fillClrLst meth="repeat">
+      <a:schemeClr val="accent1">
+        <a:tint val="50000"/>
+      </a:schemeClr>
+    </dgm:fillClrLst>
+    <dgm:linClrLst meth="repeat">
+      <a:schemeClr val="lt1"/>
+    </dgm:linClrLst>
+    <dgm:effectClrLst/>
+    <dgm:txLinClrLst/>
+    <dgm:txFillClrLst meth="repeat">
+      <a:schemeClr val="lt1"/>
+    </dgm:txFillClrLst>
+    <dgm:txEffectClrLst/>
+  </dgm:styleLbl>
+  <dgm:styleLbl name="bgImgPlace1">
+    <dgm:fillClrLst meth="repeat">
+      <a:schemeClr val="accent1">
+        <a:tint val="50000"/>
+      </a:schemeClr>
+    </dgm:fillClrLst>
+    <dgm:linClrLst meth="repeat">
+      <a:schemeClr val="lt1"/>
+    </dgm:linClrLst>
+    <dgm:effectClrLst/>
+    <dgm:txLinClrLst/>
+    <dgm:txFillClrLst meth="repeat">
+      <a:schemeClr val="lt1"/>
+    </dgm:txFillClrLst>
+    <dgm:txEffectClrLst/>
+  </dgm:styleLbl>
+  <dgm:styleLbl name="sibTrans2D1">
+    <dgm:fillClrLst meth="repeat">
+      <a:schemeClr val="accent1">
+        <a:tint val="60000"/>
+      </a:schemeClr>
+    </dgm:fillClrLst>
+    <dgm:linClrLst meth="repeat">
+      <a:schemeClr val="accent1">
+        <a:tint val="60000"/>
+      </a:schemeClr>
+    </dgm:linClrLst>
+    <dgm:effectClrLst/>
+    <dgm:txLinClrLst/>
+    <dgm:txFillClrLst/>
+    <dgm:txEffectClrLst/>
+  </dgm:styleLbl>
+  <dgm:styleLbl name="fgSibTrans2D1">
+    <dgm:fillClrLst meth="repeat">
+      <a:schemeClr val="accent1">
+        <a:tint val="60000"/>
+      </a:schemeClr>
+    </dgm:fillClrLst>
+    <dgm:linClrLst meth="repeat">
+      <a:schemeClr val="accent1">
+        <a:tint val="60000"/>
+      </a:schemeClr>
+    </dgm:linClrLst>
+    <dgm:effectClrLst/>
+    <dgm:txLinClrLst/>
+    <dgm:txFillClrLst/>
+    <dgm:txEffectClrLst/>
+  </dgm:styleLbl>
+  <dgm:styleLbl name="bgSibTrans2D1">
+    <dgm:fillClrLst meth="repeat">
+      <a:schemeClr val="accent1">
+        <a:tint val="60000"/>
+      </a:schemeClr>
+    </dgm:fillClrLst>
+    <dgm:linClrLst meth="repeat">
+      <a:schemeClr val="accent1">
+        <a:tint val="60000"/>
+      </a:schemeClr>
+    </dgm:linClrLst>
+    <dgm:effectClrLst/>
+    <dgm:txLinClrLst/>
+    <dgm:txFillClrLst/>
+    <dgm:txEffectClrLst/>
+  </dgm:styleLbl>
+  <dgm:styleLbl name="sibTrans1D1">
+    <dgm:fillClrLst meth="repeat">
+      <a:schemeClr val="accent1"/>
+    </dgm:fillClrLst>
+    <dgm:linClrLst meth="repeat">
+      <a:schemeClr val="accent1"/>
+    </dgm:linClrLst>
+    <dgm:effectClrLst/>
+    <dgm:txLinClrLst/>
+    <dgm:txFillClrLst meth="repeat">
+      <a:schemeClr val="tx1"/>
+    </dgm:txFillClrLst>
+    <dgm:txEffectClrLst/>
+  </dgm:styleLbl>
+  <dgm:styleLbl name="callout">
+    <dgm:fillClrLst meth="repeat">
+      <a:schemeClr val="accent1"/>
+    </dgm:fillClrLst>
+    <dgm:linClrLst meth="repeat">
+      <a:schemeClr val="accent1">
+        <a:tint val="50000"/>
+      </a:schemeClr>
+    </dgm:linClrLst>
+    <dgm:effectClrLst/>
+    <dgm:txLinClrLst/>
+    <dgm:txFillClrLst meth="repeat">
+      <a:schemeClr val="tx1"/>
+    </dgm:txFillClrLst>
+    <dgm:txEffectClrLst/>
+  </dgm:styleLbl>
+  <dgm:styleLbl name="asst0">
+    <dgm:fillClrLst meth="repeat">
+      <a:schemeClr val="accent1"/>
+    </dgm:fillClrLst>
+    <dgm:linClrLst meth="repeat">
+      <a:schemeClr val="lt1"/>
+    </dgm:linClrLst>
+    <dgm:effectClrLst/>
+    <dgm:txLinClrLst/>
+    <dgm:txFillClrLst/>
+    <dgm:txEffectClrLst/>
+  </dgm:styleLbl>
+  <dgm:styleLbl name="asst1">
+    <dgm:fillClrLst meth="repeat">
+      <a:schemeClr val="accent1"/>
+    </dgm:fillClrLst>
+    <dgm:linClrLst meth="repeat">
+      <a:schemeClr val="lt1"/>
+    </dgm:linClrLst>
+    <dgm:effectClrLst/>
+    <dgm:txLinClrLst/>
+    <dgm:txFillClrLst/>
+    <dgm:txEffectClrLst/>
+  </dgm:styleLbl>
+  <dgm:styleLbl name="asst2">
+    <dgm:fillClrLst meth="repeat">
+      <a:schemeClr val="accent1"/>
+    </dgm:fillClrLst>
+    <dgm:linClrLst meth="repeat">
+      <a:schemeClr val="lt1"/>
+    </dgm:linClrLst>
+    <dgm:effectClrLst/>
+    <dgm:txLinClrLst/>
+    <dgm:txFillClrLst/>
+    <dgm:txEffectClrLst/>
+  </dgm:styleLbl>
+  <dgm:styleLbl name="asst3">
+    <dgm:fillClrLst meth="repeat">
+      <a:schemeClr val="accent1"/>
+    </dgm:fillClrLst>
+    <dgm:linClrLst meth="repeat">
+      <a:schemeClr val="lt1"/>
+    </dgm:linClrLst>
+    <dgm:effectClrLst/>
+    <dgm:txLinClrLst/>
+    <dgm:txFillClrLst/>
+    <dgm:txEffectClrLst/>
+  </dgm:styleLbl>
+  <dgm:styleLbl name="asst4">
+    <dgm:fillClrLst meth="repeat">
+      <a:schemeClr val="accent1"/>
+    </dgm:fillClrLst>
+    <dgm:linClrLst meth="repeat">
+      <a:schemeClr val="lt1"/>
+    </dgm:linClrLst>
+    <dgm:effectClrLst/>
+    <dgm:txLinClrLst/>
+    <dgm:txFillClrLst/>
+    <dgm:txEffectClrLst/>
+  </dgm:styleLbl>
+  <dgm:styleLbl name="parChTrans2D1">
+    <dgm:fillClrLst meth="repeat">
+      <a:schemeClr val="accent1">
+        <a:tint val="60000"/>
+      </a:schemeClr>
+    </dgm:fillClrLst>
+    <dgm:linClrLst meth="repeat">
+      <a:schemeClr val="accent1">
+        <a:tint val="60000"/>
+      </a:schemeClr>
+    </dgm:linClrLst>
+    <dgm:effectClrLst/>
+    <dgm:txLinClrLst/>
+    <dgm:txFillClrLst meth="repeat">
+      <a:schemeClr val="lt1"/>
+    </dgm:txFillClrLst>
+    <dgm:txEffectClrLst/>
+  </dgm:styleLbl>
+  <dgm:styleLbl name="parChTrans2D2">
+    <dgm:fillClrLst meth="repeat">
+      <a:schemeClr val="accent1"/>
+    </dgm:fillClrLst>
+    <dgm:linClrLst meth="repeat">
+      <a:schemeClr val="accent1"/>
+    </dgm:linClrLst>
+    <dgm:effectClrLst/>
+    <dgm:txLinClrLst/>
+    <dgm:txFillClrLst meth="repeat">
+      <a:schemeClr val="lt1"/>
+    </dgm:txFillClrLst>
+    <dgm:txEffectClrLst/>
+  </dgm:styleLbl>
+  <dgm:styleLbl name="parChTrans2D3">
+    <dgm:fillClrLst meth="repeat">
+      <a:schemeClr val="accent1"/>
+    </dgm:fillClrLst>
+    <dgm:linClrLst meth="repeat">
+      <a:schemeClr val="accent1"/>
+    </dgm:linClrLst>
+    <dgm:effectClrLst/>
+    <dgm:txLinClrLst/>
+    <dgm:txFillClrLst meth="repeat">
+      <a:schemeClr val="lt1"/>
+    </dgm:txFillClrLst>
+    <dgm:txEffectClrLst/>
+  </dgm:styleLbl>
+  <dgm:styleLbl name="parChTrans2D4">
+    <dgm:fillClrLst meth="repeat">
+      <a:schemeClr val="accent1"/>
+    </dgm:fillClrLst>
+    <dgm:linClrLst meth="repeat">
+      <a:schemeClr val="accent1"/>
+    </dgm:linClrLst>
+    <dgm:effectClrLst/>
+    <dgm:txLinClrLst/>
+    <dgm:txFillClrLst meth="repeat">
+      <a:schemeClr val="lt1"/>
+    </dgm:txFillClrLst>
+    <dgm:txEffectClrLst/>
+  </dgm:styleLbl>
+  <dgm:styleLbl name="parChTrans1D1">
+    <dgm:fillClrLst meth="repeat">
+      <a:schemeClr val="accent1"/>
+    </dgm:fillClrLst>
+    <dgm:linClrLst meth="repeat">
+      <a:schemeClr val="accent1">
+        <a:shade val="60000"/>
+      </a:schemeClr>
+    </dgm:linClrLst>
+    <dgm:effectClrLst/>
+    <dgm:txLinClrLst/>
+    <dgm:txFillClrLst meth="repeat">
+      <a:schemeClr val="tx1"/>
+    </dgm:txFillClrLst>
+    <dgm:txEffectClrLst/>
+  </dgm:styleLbl>
+  <dgm:styleLbl name="parChTrans1D2">
+    <dgm:fillClrLst meth="repeat">
+      <a:schemeClr val="accent1"/>
+    </dgm:fillClrLst>
+    <dgm:linClrLst meth="repeat">
+      <a:schemeClr val="accent1">
+        <a:shade val="60000"/>
+      </a:schemeClr>
+    </dgm:linClrLst>
+    <dgm:effectClrLst/>
+    <dgm:txLinClrLst/>
+    <dgm:txFillClrLst meth="repeat">
+      <a:schemeClr val="tx1"/>
+    </dgm:txFillClrLst>
+    <dgm:txEffectClrLst/>
+  </dgm:styleLbl>
+  <dgm:styleLbl name="parChTrans1D3">
+    <dgm:fillClrLst meth="repeat">
+      <a:schemeClr val="accent1"/>
+    </dgm:fillClrLst>
+    <dgm:linClrLst meth="repeat">
+      <a:schemeClr val="accent1">
+        <a:shade val="80000"/>
+      </a:schemeClr>
+    </dgm:linClrLst>
+    <dgm:effectClrLst/>
+    <dgm:txLinClrLst/>
+    <dgm:txFillClrLst meth="repeat">
+      <a:schemeClr val="tx1"/>
+    </dgm:txFillClrLst>
+    <dgm:txEffectClrLst/>
+  </dgm:styleLbl>
+  <dgm:styleLbl name="parChTrans1D4">
+    <dgm:fillClrLst meth="repeat">
+      <a:schemeClr val="accent1"/>
+    </dgm:fillClrLst>
+    <dgm:linClrLst meth="repeat">
+      <a:schemeClr val="accent1">
+        <a:shade val="80000"/>
+      </a:schemeClr>
+    </dgm:linClrLst>
+    <dgm:effectClrLst/>
+    <dgm:txLinClrLst/>
+    <dgm:txFillClrLst meth="repeat">
+      <a:schemeClr val="tx1"/>
+    </dgm:txFillClrLst>
+    <dgm:txEffectClrLst/>
+  </dgm:styleLbl>
+  <dgm:styleLbl name="fgAcc1">
+    <dgm:fillClrLst meth="repeat">
+      <a:schemeClr val="lt1">
+        <a:alpha val="90000"/>
+      </a:schemeClr>
+    </dgm:fillClrLst>
+    <dgm:linClrLst meth="repeat">
+      <a:schemeClr val="accent1"/>
+    </dgm:linClrLst>
+    <dgm:effectClrLst/>
+    <dgm:txLinClrLst/>
+    <dgm:txFillClrLst meth="repeat">
+      <a:schemeClr val="dk1"/>
+    </dgm:txFillClrLst>
+    <dgm:txEffectClrLst/>
+  </dgm:styleLbl>
+  <dgm:styleLbl name="conFgAcc1">
+    <dgm:fillClrLst meth="repeat">
+      <a:schemeClr val="lt1">
+        <a:alpha val="90000"/>
+      </a:schemeClr>
+    </dgm:fillClrLst>
+    <dgm:linClrLst meth="repeat">
+      <a:schemeClr val="accent1"/>
+    </dgm:linClrLst>
+    <dgm:effectClrLst/>
+    <dgm:txLinClrLst/>
+    <dgm:txFillClrLst meth="repeat">
+      <a:schemeClr val="dk1"/>
+    </dgm:txFillClrLst>
+    <dgm:txEffectClrLst/>
+  </dgm:styleLbl>
+  <dgm:styleLbl name="alignAcc1">
+    <dgm:fillClrLst meth="repeat">
+      <a:schemeClr val="lt1">
+        <a:alpha val="90000"/>
+      </a:schemeClr>
+    </dgm:fillClrLst>
+    <dgm:linClrLst meth="repeat">
+      <a:schemeClr val="accent1"/>
+    </dgm:linClrLst>
+    <dgm:effectClrLst/>
+    <dgm:txLinClrLst/>
+    <dgm:txFillClrLst meth="repeat">
+      <a:schemeClr val="dk1"/>
+    </dgm:txFillClrLst>
+    <dgm:txEffectClrLst/>
+  </dgm:styleLbl>
+  <dgm:styleLbl name="trAlignAcc1">
+    <dgm:fillClrLst meth="repeat">
+      <a:schemeClr val="lt1">
+        <a:alpha val="40000"/>
+      </a:schemeClr>
+    </dgm:fillClrLst>
+    <dgm:linClrLst meth="repeat">
+      <a:schemeClr val="accent1"/>
+    </dgm:linClrLst>
+    <dgm:effectClrLst/>
+    <dgm:txLinClrLst/>
+    <dgm:txFillClrLst meth="repeat">
+      <a:schemeClr val="dk1"/>
+    </dgm:txFillClrLst>
+    <dgm:txEffectClrLst/>
+  </dgm:styleLbl>
+  <dgm:styleLbl name="bgAcc1">
+    <dgm:fillClrLst meth="repeat">
+      <a:schemeClr val="lt1">
+        <a:alpha val="90000"/>
+      </a:schemeClr>
+    </dgm:fillClrLst>
+    <dgm:linClrLst meth="repeat">
+      <a:schemeClr val="accent1"/>
+    </dgm:linClrLst>
+    <dgm:effectClrLst/>
+    <dgm:txLinClrLst/>
+    <dgm:txFillClrLst meth="repeat">
+      <a:schemeClr val="dk1"/>
+    </dgm:txFillClrLst>
+    <dgm:txEffectClrLst/>
+  </dgm:styleLbl>
+  <dgm:styleLbl name="solidFgAcc1">
+    <dgm:fillClrLst meth="repeat">
+      <a:schemeClr val="lt1"/>
+    </dgm:fillClrLst>
+    <dgm:linClrLst meth="repeat">
+      <a:schemeClr val="accent1"/>
+    </dgm:linClrLst>
+    <dgm:effectClrLst/>
+    <dgm:txLinClrLst/>
+    <dgm:txFillClrLst meth="repeat">
+      <a:schemeClr val="dk1"/>
+    </dgm:txFillClrLst>
+    <dgm:txEffectClrLst/>
+  </dgm:styleLbl>
+  <dgm:styleLbl name="solidAlignAcc1">
+    <dgm:fillClrLst meth="repeat">
+      <a:schemeClr val="lt1"/>
+    </dgm:fillClrLst>
+    <dgm:linClrLst meth="repeat">
+      <a:schemeClr val="accent1"/>
+    </dgm:linClrLst>
+    <dgm:effectClrLst/>
+    <dgm:txLinClrLst/>
+    <dgm:txFillClrLst meth="repeat">
+      <a:schemeClr val="dk1"/>
+    </dgm:txFillClrLst>
+    <dgm:txEffectClrLst/>
+  </dgm:styleLbl>
+  <dgm:styleLbl name="solidBgAcc1">
+    <dgm:fillClrLst meth="repeat">
+      <a:schemeClr val="lt1"/>
+    </dgm:fillClrLst>
+    <dgm:linClrLst meth="repeat">
+      <a:schemeClr val="accent1"/>
+    </dgm:linClrLst>
+    <dgm:effectClrLst/>
+    <dgm:txLinClrLst/>
+    <dgm:txFillClrLst meth="repeat">
+      <a:schemeClr val="dk1"/>
+    </dgm:txFillClrLst>
+    <dgm:txEffectClrLst/>
+  </dgm:styleLbl>
+  <dgm:styleLbl name="fgAccFollowNode1">
+    <dgm:fillClrLst meth="repeat">
+      <a:schemeClr val="accent1">
+        <a:alpha val="90000"/>
+        <a:tint val="40000"/>
+      </a:schemeClr>
+    </dgm:fillClrLst>
+    <dgm:linClrLst meth="repeat">
+      <a:schemeClr val="accent1">
+        <a:alpha val="90000"/>
+        <a:tint val="40000"/>
+      </a:schemeClr>
+    </dgm:linClrLst>
+    <dgm:effectClrLst/>
+    <dgm:txLinClrLst/>
+    <dgm:txFillClrLst meth="repeat">
+      <a:schemeClr val="dk1"/>
+    </dgm:txFillClrLst>
+    <dgm:txEffectClrLst/>
+  </dgm:styleLbl>
+  <dgm:styleLbl name="alignAccFollowNode1">
+    <dgm:fillClrLst meth="repeat">
+      <a:schemeClr val="accent1">
+        <a:alpha val="90000"/>
+        <a:tint val="40000"/>
+      </a:schemeClr>
+    </dgm:fillClrLst>
+    <dgm:linClrLst meth="repeat">
+      <a:schemeClr val="accent1">
+        <a:alpha val="90000"/>
+        <a:tint val="40000"/>
+      </a:schemeClr>
+    </dgm:linClrLst>
+    <dgm:effectClrLst/>
+    <dgm:txLinClrLst/>
+    <dgm:txFillClrLst meth="repeat">
+      <a:schemeClr val="dk1"/>
+    </dgm:txFillClrLst>
+    <dgm:txEffectClrLst/>
+  </dgm:styleLbl>
+  <dgm:styleLbl name="bgAccFollowNode1">
+    <dgm:fillClrLst meth="repeat">
+      <a:schemeClr val="accent1">
+        <a:alpha val="90000"/>
+        <a:tint val="40000"/>
+      </a:schemeClr>
+    </dgm:fillClrLst>
+    <dgm:linClrLst meth="repeat">
+      <a:schemeClr val="accent1">
+        <a:alpha val="90000"/>
+        <a:tint val="40000"/>
+      </a:schemeClr>
+    </dgm:linClrLst>
+    <dgm:effectClrLst/>
+    <dgm:txLinClrLst/>
+    <dgm:txFillClrLst meth="repeat">
+      <a:schemeClr val="dk1"/>
+    </dgm:txFillClrLst>
+    <dgm:txEffectClrLst/>
+  </dgm:styleLbl>
+  <dgm:styleLbl name="fgAcc0">
+    <dgm:fillClrLst meth="repeat">
+      <a:schemeClr val="lt1">
+        <a:alpha val="90000"/>
+      </a:schemeClr>
+    </dgm:fillClrLst>
+    <dgm:linClrLst meth="repeat">
+      <a:schemeClr val="accent1"/>
+    </dgm:linClrLst>
+    <dgm:effectClrLst/>
+    <dgm:txLinClrLst/>
+    <dgm:txFillClrLst meth="repeat">
+      <a:schemeClr val="dk1"/>
+    </dgm:txFillClrLst>
+    <dgm:txEffectClrLst/>
+  </dgm:styleLbl>
+  <dgm:styleLbl name="fgAcc2">
+    <dgm:fillClrLst meth="repeat">
+      <a:schemeClr val="lt1">
+        <a:alpha val="90000"/>
+      </a:schemeClr>
+    </dgm:fillClrLst>
+    <dgm:linClrLst meth="repeat">
+      <a:schemeClr val="accent1"/>
+    </dgm:linClrLst>
+    <dgm:effectClrLst/>
+    <dgm:txLinClrLst/>
+    <dgm:txFillClrLst meth="repeat">
+      <a:schemeClr val="dk1"/>
+    </dgm:txFillClrLst>
+    <dgm:txEffectClrLst/>
+  </dgm:styleLbl>
+  <dgm:styleLbl name="fgAcc3">
+    <dgm:fillClrLst meth="repeat">
+      <a:schemeClr val="lt1">
+        <a:alpha val="90000"/>
+      </a:schemeClr>
+    </dgm:fillClrLst>
+    <dgm:linClrLst meth="repeat">
+      <a:schemeClr val="accent1"/>
+    </dgm:linClrLst>
+    <dgm:effectClrLst/>
+    <dgm:txLinClrLst/>
+    <dgm:txFillClrLst meth="repeat">
+      <a:schemeClr val="dk1"/>
+    </dgm:txFillClrLst>
+    <dgm:txEffectClrLst/>
+  </dgm:styleLbl>
+  <dgm:styleLbl name="fgAcc4">
+    <dgm:fillClrLst meth="repeat">
+      <a:schemeClr val="lt1">
+        <a:alpha val="90000"/>
+      </a:schemeClr>
+    </dgm:fillClrLst>
+    <dgm:linClrLst meth="repeat">
+      <a:schemeClr val="accent1"/>
+    </dgm:linClrLst>
+    <dgm:effectClrLst/>
+    <dgm:txLinClrLst/>
+    <dgm:txFillClrLst meth="repeat">
+      <a:schemeClr val="dk1"/>
+    </dgm:txFillClrLst>
+    <dgm:txEffectClrLst/>
+  </dgm:styleLbl>
+  <dgm:styleLbl name="bgShp">
+    <dgm:fillClrLst meth="repeat">
+      <a:schemeClr val="accent1">
+        <a:tint val="40000"/>
+      </a:schemeClr>
+    </dgm:fillClrLst>
+    <dgm:linClrLst meth="repeat">
+      <a:schemeClr val="accent1"/>
+    </dgm:linClrLst>
+    <dgm:effectClrLst/>
+    <dgm:txLinClrLst/>
+    <dgm:txFillClrLst meth="repeat">
+      <a:schemeClr val="dk1"/>
+    </dgm:txFillClrLst>
+    <dgm:txEffectClrLst/>
+  </dgm:styleLbl>
+  <dgm:styleLbl name="dkBgShp">
+    <dgm:fillClrLst meth="repeat">
+      <a:schemeClr val="accent1">
+        <a:shade val="80000"/>
+      </a:schemeClr>
+    </dgm:fillClrLst>
+    <dgm:linClrLst meth="repeat">
+      <a:schemeClr val="accent1"/>
+    </dgm:linClrLst>
+    <dgm:effectClrLst/>
+    <dgm:txLinClrLst/>
+    <dgm:txFillClrLst meth="repeat">
+      <a:schemeClr val="lt1"/>
+    </dgm:txFillClrLst>
+    <dgm:txEffectClrLst/>
+  </dgm:styleLbl>
+  <dgm:styleLbl name="trBgShp">
+    <dgm:fillClrLst meth="repeat">
+      <a:schemeClr val="accent1">
+        <a:tint val="50000"/>
+        <a:alpha val="40000"/>
+      </a:schemeClr>
+    </dgm:fillClrLst>
+    <dgm:linClrLst meth="repeat">
+      <a:schemeClr val="accent1"/>
+    </dgm:linClrLst>
+    <dgm:effectClrLst/>
+    <dgm:txLinClrLst/>
+    <dgm:txFillClrLst meth="repeat">
+      <a:schemeClr val="lt1"/>
+    </dgm:txFillClrLst>
+    <dgm:txEffectClrLst/>
+  </dgm:styleLbl>
+  <dgm:styleLbl name="fgShp">
+    <dgm:fillClrLst meth="repeat">
+      <a:schemeClr val="accent1">
+        <a:tint val="60000"/>
+      </a:schemeClr>
+    </dgm:fillClrLst>
+    <dgm:linClrLst meth="repeat">
+      <a:schemeClr val="lt1"/>
+    </dgm:linClrLst>
+    <dgm:effectClrLst/>
+    <dgm:txLinClrLst/>
+    <dgm:txFillClrLst meth="repeat">
+      <a:schemeClr val="dk1"/>
+    </dgm:txFillClrLst>
+    <dgm:txEffectClrLst/>
+  </dgm:styleLbl>
+  <dgm:styleLbl name="revTx">
+    <dgm:fillClrLst meth="repeat">
+      <a:schemeClr val="lt1">
+        <a:alpha val="0"/>
+      </a:schemeClr>
+    </dgm:fillClrLst>
+    <dgm:linClrLst meth="repeat">
+      <a:schemeClr val="dk1">
+        <a:alpha val="0"/>
+      </a:schemeClr>
+    </dgm:linClrLst>
+    <dgm:effectClrLst/>
+    <dgm:txLinClrLst/>
+    <dgm:txFillClrLst meth="repeat">
+      <a:schemeClr val="tx1"/>
+    </dgm:txFillClrLst>
+    <dgm:txEffectClrLst/>
+  </dgm:styleLbl>
+</dgm:colorsDef>
+</file>
+
+<file path=ppt/diagrams/data1.xml><?xml version="1.0" encoding="utf-8"?>
+<dgm:dataModel xmlns:dgm="http://schemas.openxmlformats.org/drawingml/2006/diagram" xmlns:a="http://schemas.openxmlformats.org/drawingml/2006/main">
+  <dgm:ptLst>
+    <dgm:pt modelId="{7D83BC78-BBB7-4C9A-9C3F-317AA8D7F913}" type="doc">
+      <dgm:prSet loTypeId="urn:microsoft.com/office/officeart/2005/8/layout/vList2" loCatId="list" qsTypeId="urn:microsoft.com/office/officeart/2005/8/quickstyle/simple1" qsCatId="simple" csTypeId="urn:microsoft.com/office/officeart/2005/8/colors/accent1_2" csCatId="accent1"/>
+      <dgm:spPr/>
+      <dgm:t>
+        <a:bodyPr/>
+        <a:lstStyle/>
+        <a:p>
+          <a:endParaRPr lang="en-US"/>
+        </a:p>
+      </dgm:t>
+    </dgm:pt>
+    <dgm:pt modelId="{6CD011EE-4793-48A6-8C97-96ACDFD76A1E}">
+      <dgm:prSet/>
+      <dgm:spPr/>
+      <dgm:t>
+        <a:bodyPr/>
+        <a:lstStyle/>
+        <a:p>
+          <a:r>
+            <a:rPr lang="nl-NL" b="0"/>
+            <a:t>Hoe ‘OO’ is jouw code?</a:t>
+          </a:r>
+          <a:endParaRPr lang="en-US"/>
+        </a:p>
+      </dgm:t>
+    </dgm:pt>
+    <dgm:pt modelId="{5BC5EE8A-034F-4052-B3C8-B3F7B040B071}" type="parTrans" cxnId="{9F431FBF-5EAA-4420-AC1B-D57F269086CC}">
+      <dgm:prSet/>
+      <dgm:spPr/>
+      <dgm:t>
+        <a:bodyPr/>
+        <a:lstStyle/>
+        <a:p>
+          <a:endParaRPr lang="en-US"/>
+        </a:p>
+      </dgm:t>
+    </dgm:pt>
+    <dgm:pt modelId="{E6F3F8F5-E164-48DD-8A65-622A18036361}" type="sibTrans" cxnId="{9F431FBF-5EAA-4420-AC1B-D57F269086CC}">
+      <dgm:prSet/>
+      <dgm:spPr/>
+      <dgm:t>
+        <a:bodyPr/>
+        <a:lstStyle/>
+        <a:p>
+          <a:endParaRPr lang="en-US"/>
+        </a:p>
+      </dgm:t>
+    </dgm:pt>
+    <dgm:pt modelId="{A28795A4-F919-47E1-8AD8-6EF60807DE50}">
+      <dgm:prSet/>
+      <dgm:spPr/>
+      <dgm:t>
+        <a:bodyPr/>
+        <a:lstStyle/>
+        <a:p>
+          <a:r>
+            <a:rPr lang="nl-NL" b="0"/>
+            <a:t>Kunnen design patterns je code mooier maken?</a:t>
+          </a:r>
+          <a:endParaRPr lang="en-US"/>
+        </a:p>
+      </dgm:t>
+    </dgm:pt>
+    <dgm:pt modelId="{9EA817D0-9EF9-4AD3-869B-A99AEAF09BCB}" type="parTrans" cxnId="{942A7BF1-1627-4C0E-A347-7232AA69E7B7}">
+      <dgm:prSet/>
+      <dgm:spPr/>
+      <dgm:t>
+        <a:bodyPr/>
+        <a:lstStyle/>
+        <a:p>
+          <a:endParaRPr lang="en-US"/>
+        </a:p>
+      </dgm:t>
+    </dgm:pt>
+    <dgm:pt modelId="{FD8FCEDD-5FEC-4694-9F3D-3C8CD24E489A}" type="sibTrans" cxnId="{942A7BF1-1627-4C0E-A347-7232AA69E7B7}">
+      <dgm:prSet/>
+      <dgm:spPr/>
+      <dgm:t>
+        <a:bodyPr/>
+        <a:lstStyle/>
+        <a:p>
+          <a:endParaRPr lang="en-US"/>
+        </a:p>
+      </dgm:t>
+    </dgm:pt>
+    <dgm:pt modelId="{666D8012-C7A3-4BBA-88B6-FD527E0D3DDE}" type="pres">
+      <dgm:prSet presAssocID="{7D83BC78-BBB7-4C9A-9C3F-317AA8D7F913}" presName="linear" presStyleCnt="0">
+        <dgm:presLayoutVars>
+          <dgm:animLvl val="lvl"/>
+          <dgm:resizeHandles val="exact"/>
+        </dgm:presLayoutVars>
+      </dgm:prSet>
+      <dgm:spPr/>
+    </dgm:pt>
+    <dgm:pt modelId="{D335F0E5-0546-4211-9420-183748509A08}" type="pres">
+      <dgm:prSet presAssocID="{6CD011EE-4793-48A6-8C97-96ACDFD76A1E}" presName="parentText" presStyleLbl="node1" presStyleIdx="0" presStyleCnt="2">
+        <dgm:presLayoutVars>
+          <dgm:chMax val="0"/>
+          <dgm:bulletEnabled val="1"/>
+        </dgm:presLayoutVars>
+      </dgm:prSet>
+      <dgm:spPr/>
+    </dgm:pt>
+    <dgm:pt modelId="{FE0CBC9D-B607-48A3-9826-4F1F36132515}" type="pres">
+      <dgm:prSet presAssocID="{E6F3F8F5-E164-48DD-8A65-622A18036361}" presName="spacer" presStyleCnt="0"/>
+      <dgm:spPr/>
+    </dgm:pt>
+    <dgm:pt modelId="{AFA41E42-A6D7-4E2F-B972-35168ECAAA30}" type="pres">
+      <dgm:prSet presAssocID="{A28795A4-F919-47E1-8AD8-6EF60807DE50}" presName="parentText" presStyleLbl="node1" presStyleIdx="1" presStyleCnt="2">
+        <dgm:presLayoutVars>
+          <dgm:chMax val="0"/>
+          <dgm:bulletEnabled val="1"/>
+        </dgm:presLayoutVars>
+      </dgm:prSet>
+      <dgm:spPr/>
+    </dgm:pt>
+  </dgm:ptLst>
+  <dgm:cxnLst>
+    <dgm:cxn modelId="{1560EABB-5777-49A5-8606-1E648144CB64}" type="presOf" srcId="{7D83BC78-BBB7-4C9A-9C3F-317AA8D7F913}" destId="{666D8012-C7A3-4BBA-88B6-FD527E0D3DDE}" srcOrd="0" destOrd="0" presId="urn:microsoft.com/office/officeart/2005/8/layout/vList2"/>
+    <dgm:cxn modelId="{9F431FBF-5EAA-4420-AC1B-D57F269086CC}" srcId="{7D83BC78-BBB7-4C9A-9C3F-317AA8D7F913}" destId="{6CD011EE-4793-48A6-8C97-96ACDFD76A1E}" srcOrd="0" destOrd="0" parTransId="{5BC5EE8A-034F-4052-B3C8-B3F7B040B071}" sibTransId="{E6F3F8F5-E164-48DD-8A65-622A18036361}"/>
+    <dgm:cxn modelId="{1634F7CE-2FF8-4674-BF67-86E037DE1DE5}" type="presOf" srcId="{A28795A4-F919-47E1-8AD8-6EF60807DE50}" destId="{AFA41E42-A6D7-4E2F-B972-35168ECAAA30}" srcOrd="0" destOrd="0" presId="urn:microsoft.com/office/officeart/2005/8/layout/vList2"/>
+    <dgm:cxn modelId="{942A7BF1-1627-4C0E-A347-7232AA69E7B7}" srcId="{7D83BC78-BBB7-4C9A-9C3F-317AA8D7F913}" destId="{A28795A4-F919-47E1-8AD8-6EF60807DE50}" srcOrd="1" destOrd="0" parTransId="{9EA817D0-9EF9-4AD3-869B-A99AEAF09BCB}" sibTransId="{FD8FCEDD-5FEC-4694-9F3D-3C8CD24E489A}"/>
+    <dgm:cxn modelId="{CB58FBF4-D4DD-4D2C-A633-8F61CF880103}" type="presOf" srcId="{6CD011EE-4793-48A6-8C97-96ACDFD76A1E}" destId="{D335F0E5-0546-4211-9420-183748509A08}" srcOrd="0" destOrd="0" presId="urn:microsoft.com/office/officeart/2005/8/layout/vList2"/>
+    <dgm:cxn modelId="{B02B1E79-E189-4A68-9FA5-7AE62F7A47B5}" type="presParOf" srcId="{666D8012-C7A3-4BBA-88B6-FD527E0D3DDE}" destId="{D335F0E5-0546-4211-9420-183748509A08}" srcOrd="0" destOrd="0" presId="urn:microsoft.com/office/officeart/2005/8/layout/vList2"/>
+    <dgm:cxn modelId="{B47631F9-9E8A-4DA8-AC1C-755BE88AAC5E}" type="presParOf" srcId="{666D8012-C7A3-4BBA-88B6-FD527E0D3DDE}" destId="{FE0CBC9D-B607-48A3-9826-4F1F36132515}" srcOrd="1" destOrd="0" presId="urn:microsoft.com/office/officeart/2005/8/layout/vList2"/>
+    <dgm:cxn modelId="{D290A658-B55F-4D8E-95F5-CA1E1D815476}" type="presParOf" srcId="{666D8012-C7A3-4BBA-88B6-FD527E0D3DDE}" destId="{AFA41E42-A6D7-4E2F-B972-35168ECAAA30}" srcOrd="2" destOrd="0" presId="urn:microsoft.com/office/officeart/2005/8/layout/vList2"/>
+  </dgm:cxnLst>
+  <dgm:bg/>
+  <dgm:whole/>
+  <dgm:extLst>
+    <a:ext uri="http://schemas.microsoft.com/office/drawing/2008/diagram">
+      <dsp:dataModelExt xmlns:dsp="http://schemas.microsoft.com/office/drawing/2008/diagram" relId="rId6" minVer="http://schemas.openxmlformats.org/drawingml/2006/diagram"/>
+    </a:ext>
+  </dgm:extLst>
+</dgm:dataModel>
+</file>
+
+<file path=ppt/diagrams/drawing1.xml><?xml version="1.0" encoding="utf-8"?>
+<dsp:drawing xmlns:dgm="http://schemas.openxmlformats.org/drawingml/2006/diagram" xmlns:dsp="http://schemas.microsoft.com/office/drawing/2008/diagram" xmlns:a="http://schemas.openxmlformats.org/drawingml/2006/main">
+  <dsp:spTree>
+    <dsp:nvGrpSpPr>
+      <dsp:cNvPr id="0" name=""/>
+      <dsp:cNvGrpSpPr/>
+    </dsp:nvGrpSpPr>
+    <dsp:grpSpPr/>
+    <dsp:sp modelId="{D335F0E5-0546-4211-9420-183748509A08}">
+      <dsp:nvSpPr>
+        <dsp:cNvPr id="0" name=""/>
+        <dsp:cNvSpPr/>
+      </dsp:nvSpPr>
+      <dsp:spPr>
+        <a:xfrm>
+          <a:off x="0" y="27751"/>
+          <a:ext cx="9925049" cy="1939275"/>
+        </a:xfrm>
+        <a:prstGeom prst="roundRect">
+          <a:avLst/>
+        </a:prstGeom>
+        <a:solidFill>
+          <a:schemeClr val="accent1">
+            <a:hueOff val="0"/>
+            <a:satOff val="0"/>
+            <a:lumOff val="0"/>
+            <a:alphaOff val="0"/>
+          </a:schemeClr>
+        </a:solidFill>
+        <a:ln w="25400" cap="flat" cmpd="sng" algn="ctr">
+          <a:solidFill>
+            <a:schemeClr val="lt1">
+              <a:hueOff val="0"/>
+              <a:satOff val="0"/>
+              <a:lumOff val="0"/>
+              <a:alphaOff val="0"/>
+            </a:schemeClr>
+          </a:solidFill>
+          <a:prstDash val="solid"/>
+        </a:ln>
+        <a:effectLst/>
+      </dsp:spPr>
+      <dsp:style>
+        <a:lnRef idx="2">
+          <a:scrgbClr r="0" g="0" b="0"/>
+        </a:lnRef>
+        <a:fillRef idx="1">
+          <a:scrgbClr r="0" g="0" b="0"/>
+        </a:fillRef>
+        <a:effectRef idx="0">
+          <a:scrgbClr r="0" g="0" b="0"/>
+        </a:effectRef>
+        <a:fontRef idx="minor">
+          <a:schemeClr val="lt1"/>
+        </a:fontRef>
+      </dsp:style>
+      <dsp:txBody>
+        <a:bodyPr spcFirstLastPara="0" vert="horz" wrap="square" lIns="194310" tIns="194310" rIns="194310" bIns="194310" numCol="1" spcCol="1270" anchor="ctr" anchorCtr="0">
+          <a:noAutofit/>
+        </a:bodyPr>
+        <a:lstStyle/>
+        <a:p>
+          <a:pPr marL="0" lvl="0" indent="0" algn="l" defTabSz="2266950">
+            <a:lnSpc>
+              <a:spcPct val="90000"/>
+            </a:lnSpc>
+            <a:spcBef>
+              <a:spcPct val="0"/>
+            </a:spcBef>
+            <a:spcAft>
+              <a:spcPct val="35000"/>
+            </a:spcAft>
+            <a:buNone/>
+          </a:pPr>
+          <a:r>
+            <a:rPr lang="nl-NL" sz="5100" b="0" kern="1200"/>
+            <a:t>Hoe ‘OO’ is jouw code?</a:t>
+          </a:r>
+          <a:endParaRPr lang="en-US" sz="5100" kern="1200"/>
+        </a:p>
+      </dsp:txBody>
+      <dsp:txXfrm>
+        <a:off x="94668" y="122419"/>
+        <a:ext cx="9735713" cy="1749939"/>
+      </dsp:txXfrm>
+    </dsp:sp>
+    <dsp:sp modelId="{AFA41E42-A6D7-4E2F-B972-35168ECAAA30}">
+      <dsp:nvSpPr>
+        <dsp:cNvPr id="0" name=""/>
+        <dsp:cNvSpPr/>
+      </dsp:nvSpPr>
+      <dsp:spPr>
+        <a:xfrm>
+          <a:off x="0" y="2113906"/>
+          <a:ext cx="9925049" cy="1939275"/>
+        </a:xfrm>
+        <a:prstGeom prst="roundRect">
+          <a:avLst/>
+        </a:prstGeom>
+        <a:solidFill>
+          <a:schemeClr val="accent1">
+            <a:hueOff val="0"/>
+            <a:satOff val="0"/>
+            <a:lumOff val="0"/>
+            <a:alphaOff val="0"/>
+          </a:schemeClr>
+        </a:solidFill>
+        <a:ln w="25400" cap="flat" cmpd="sng" algn="ctr">
+          <a:solidFill>
+            <a:schemeClr val="lt1">
+              <a:hueOff val="0"/>
+              <a:satOff val="0"/>
+              <a:lumOff val="0"/>
+              <a:alphaOff val="0"/>
+            </a:schemeClr>
+          </a:solidFill>
+          <a:prstDash val="solid"/>
+        </a:ln>
+        <a:effectLst/>
+      </dsp:spPr>
+      <dsp:style>
+        <a:lnRef idx="2">
+          <a:scrgbClr r="0" g="0" b="0"/>
+        </a:lnRef>
+        <a:fillRef idx="1">
+          <a:scrgbClr r="0" g="0" b="0"/>
+        </a:fillRef>
+        <a:effectRef idx="0">
+          <a:scrgbClr r="0" g="0" b="0"/>
+        </a:effectRef>
+        <a:fontRef idx="minor">
+          <a:schemeClr val="lt1"/>
+        </a:fontRef>
+      </dsp:style>
+      <dsp:txBody>
+        <a:bodyPr spcFirstLastPara="0" vert="horz" wrap="square" lIns="194310" tIns="194310" rIns="194310" bIns="194310" numCol="1" spcCol="1270" anchor="ctr" anchorCtr="0">
+          <a:noAutofit/>
+        </a:bodyPr>
+        <a:lstStyle/>
+        <a:p>
+          <a:pPr marL="0" lvl="0" indent="0" algn="l" defTabSz="2266950">
+            <a:lnSpc>
+              <a:spcPct val="90000"/>
+            </a:lnSpc>
+            <a:spcBef>
+              <a:spcPct val="0"/>
+            </a:spcBef>
+            <a:spcAft>
+              <a:spcPct val="35000"/>
+            </a:spcAft>
+            <a:buNone/>
+          </a:pPr>
+          <a:r>
+            <a:rPr lang="nl-NL" sz="5100" b="0" kern="1200"/>
+            <a:t>Kunnen design patterns je code mooier maken?</a:t>
+          </a:r>
+          <a:endParaRPr lang="en-US" sz="5100" kern="1200"/>
+        </a:p>
+      </dsp:txBody>
+      <dsp:txXfrm>
+        <a:off x="94668" y="2208574"/>
+        <a:ext cx="9735713" cy="1749939"/>
+      </dsp:txXfrm>
+    </dsp:sp>
+  </dsp:spTree>
+</dsp:drawing>
+</file>
+
+<file path=ppt/diagrams/layout1.xml><?xml version="1.0" encoding="utf-8"?>
+<dgm:layoutDef xmlns:dgm="http://schemas.openxmlformats.org/drawingml/2006/diagram" xmlns:a="http://schemas.openxmlformats.org/drawingml/2006/main" uniqueId="urn:microsoft.com/office/officeart/2005/8/layout/vList2">
+  <dgm:title val=""/>
+  <dgm:desc val=""/>
+  <dgm:catLst>
+    <dgm:cat type="list" pri="3000"/>
+    <dgm:cat type="convert" pri="1000"/>
+  </dgm:catLst>
+  <dgm:sampData>
+    <dgm:dataModel>
+      <dgm:ptLst>
+        <dgm:pt modelId="0" type="doc"/>
+        <dgm:pt modelId="1">
+          <dgm:prSet phldr="1"/>
+        </dgm:pt>
+        <dgm:pt modelId="11">
+          <dgm:prSet phldr="1"/>
+        </dgm:pt>
+        <dgm:pt modelId="2">
+          <dgm:prSet phldr="1"/>
+        </dgm:pt>
+        <dgm:pt modelId="21">
+          <dgm:prSet phldr="1"/>
+        </dgm:pt>
+      </dgm:ptLst>
+      <dgm:cxnLst>
+        <dgm:cxn modelId="4" srcId="0" destId="1" srcOrd="0" destOrd="0"/>
+        <dgm:cxn modelId="5" srcId="0" destId="2" srcOrd="1" destOrd="0"/>
+        <dgm:cxn modelId="12" srcId="1" destId="11" srcOrd="0" destOrd="0"/>
+        <dgm:cxn modelId="23" srcId="2" destId="21" srcOrd="0" destOrd="0"/>
+      </dgm:cxnLst>
+      <dgm:bg/>
+      <dgm:whole/>
+    </dgm:dataModel>
+  </dgm:sampData>
+  <dgm:styleData>
+    <dgm:dataModel>
+      <dgm:ptLst>
+        <dgm:pt modelId="0" type="doc"/>
+        <dgm:pt modelId="1"/>
+        <dgm:pt modelId="2"/>
+      </dgm:ptLst>
+      <dgm:cxnLst>
+        <dgm:cxn modelId="3" srcId="0" destId="1" srcOrd="0" destOrd="0"/>
+        <dgm:cxn modelId="4" srcId="0" destId="2" srcOrd="1" destOrd="0"/>
+      </dgm:cxnLst>
+      <dgm:bg/>
+      <dgm:whole/>
+    </dgm:dataModel>
+  </dgm:styleData>
+  <dgm:clrData>
+    <dgm:dataModel>
+      <dgm:ptLst>
+        <dgm:pt modelId="0" type="doc"/>
+        <dgm:pt modelId="1"/>
+        <dgm:pt modelId="2"/>
+        <dgm:pt modelId="3"/>
+        <dgm:pt modelId="4"/>
+      </dgm:ptLst>
+      <dgm:cxnLst>
+        <dgm:cxn modelId="5" srcId="0" destId="1" srcOrd="0" destOrd="0"/>
+        <dgm:cxn modelId="6" srcId="0" destId="2" srcOrd="1" destOrd="0"/>
+        <dgm:cxn modelId="7" srcId="0" destId="3" srcOrd="2" destOrd="0"/>
+        <dgm:cxn modelId="8" srcId="0" destId="4" srcOrd="3" destOrd="0"/>
+      </dgm:cxnLst>
+      <dgm:bg/>
+      <dgm:whole/>
+    </dgm:dataModel>
+  </dgm:clrData>
+  <dgm:layoutNode name="linear">
+    <dgm:varLst>
+      <dgm:animLvl val="lvl"/>
+      <dgm:resizeHandles val="exact"/>
+    </dgm:varLst>
+    <dgm:alg type="lin">
+      <dgm:param type="linDir" val="fromT"/>
+      <dgm:param type="vertAlign" val="mid"/>
+    </dgm:alg>
+    <dgm:shape xmlns:r="http://schemas.openxmlformats.org/officeDocument/2006/relationships" r:blip="">
+      <dgm:adjLst/>
+    </dgm:shape>
+    <dgm:presOf/>
+    <dgm:constrLst>
+      <dgm:constr type="w" for="ch" forName="parentText" refType="w"/>
+      <dgm:constr type="h" for="ch" forName="parentText" refType="primFontSz" refFor="ch" refForName="parentText" fact="0.52"/>
+      <dgm:constr type="w" for="ch" forName="childText" refType="w"/>
+      <dgm:constr type="h" for="ch" forName="childText" refType="primFontSz" refFor="ch" refForName="parentText" fact="0.46"/>
+      <dgm:constr type="h" for="ch" forName="parentText" op="equ"/>
+      <dgm:constr type="primFontSz" for="ch" forName="parentText" op="equ" val="65"/>
+      <dgm:constr type="primFontSz" for="ch" forName="childText" refType="primFontSz" refFor="ch" refForName="parentText" op="equ"/>
+      <dgm:constr type="h" for="ch" forName="spacer" refType="primFontSz" refFor="ch" refForName="parentText" fact="0.08"/>
+    </dgm:constrLst>
+    <dgm:ruleLst>
+      <dgm:rule type="primFontSz" for="ch" forName="parentText" val="5" fact="NaN" max="NaN"/>
+    </dgm:ruleLst>
+    <dgm:forEach name="Name0" axis="ch" ptType="node">
+      <dgm:layoutNode name="parentText" styleLbl="node1">
+        <dgm:varLst>
+          <dgm:chMax val="0"/>
+          <dgm:bulletEnabled val="1"/>
+        </dgm:varLst>
+        <dgm:alg type="tx">
+          <dgm:param type="parTxLTRAlign" val="l"/>
+          <dgm:param type="parTxRTLAlign" val="r"/>
+        </dgm:alg>
+        <dgm:shape xmlns:r="http://schemas.openxmlformats.org/officeDocument/2006/relationships" type="roundRect" r:blip="">
+          <dgm:adjLst/>
+        </dgm:shape>
+        <dgm:presOf axis="self"/>
+        <dgm:constrLst>
+          <dgm:constr type="tMarg" refType="primFontSz" fact="0.3"/>
+          <dgm:constr type="bMarg" refType="primFontSz" fact="0.3"/>
+          <dgm:constr type="lMarg" refType="primFontSz" fact="0.3"/>
+          <dgm:constr type="rMarg" refType="primFontSz" fact="0.3"/>
+        </dgm:constrLst>
+        <dgm:ruleLst>
+          <dgm:rule type="h" val="INF" fact="NaN" max="NaN"/>
+        </dgm:ruleLst>
+      </dgm:layoutNode>
+      <dgm:choose name="Name1">
+        <dgm:if name="Name2" axis="ch" ptType="node" func="cnt" op="gte" val="1">
+          <dgm:layoutNode name="childText" styleLbl="revTx">
+            <dgm:varLst>
+              <dgm:bulletEnabled val="1"/>
+            </dgm:varLst>
+            <dgm:alg type="tx">
+              <dgm:param type="stBulletLvl" val="1"/>
+              <dgm:param type="lnSpAfChP" val="20"/>
+            </dgm:alg>
+            <dgm:shape xmlns:r="http://schemas.openxmlformats.org/officeDocument/2006/relationships" type="rect" r:blip="">
+              <dgm:adjLst/>
+            </dgm:shape>
+            <dgm:presOf axis="des" ptType="node"/>
+            <dgm:constrLst>
+              <dgm:constr type="tMarg" refType="primFontSz" fact="0.1"/>
+              <dgm:constr type="bMarg" refType="primFontSz" fact="0.1"/>
+              <dgm:constr type="lMarg" refType="w" fact="0.09"/>
+            </dgm:constrLst>
+            <dgm:ruleLst>
+              <dgm:rule type="h" val="INF" fact="NaN" max="NaN"/>
+            </dgm:ruleLst>
+          </dgm:layoutNode>
+        </dgm:if>
+        <dgm:else name="Name3">
+          <dgm:choose name="Name4">
+            <dgm:if name="Name5" axis="par ch" ptType="doc node" func="cnt" op="gte" val="2">
+              <dgm:forEach name="Name6" axis="followSib" ptType="sibTrans" cnt="1">
+                <dgm:layoutNode name="spacer">
+                  <dgm:alg type="sp"/>
+                  <dgm:shape xmlns:r="http://schemas.openxmlformats.org/officeDocument/2006/relationships" r:blip="">
+                    <dgm:adjLst/>
+                  </dgm:shape>
+                  <dgm:presOf/>
+                  <dgm:constrLst/>
+                  <dgm:ruleLst/>
+                </dgm:layoutNode>
+              </dgm:forEach>
+            </dgm:if>
+            <dgm:else name="Name7"/>
+          </dgm:choose>
+        </dgm:else>
+      </dgm:choose>
+    </dgm:forEach>
+  </dgm:layoutNode>
+</dgm:layoutDef>
+</file>
+
+<file path=ppt/diagrams/quickStyle1.xml><?xml version="1.0" encoding="utf-8"?>
+<dgm:styleDef xmlns:dgm="http://schemas.openxmlformats.org/drawingml/2006/diagram" xmlns:a="http://schemas.openxmlformats.org/drawingml/2006/main" uniqueId="urn:microsoft.com/office/officeart/2005/8/quickstyle/simple1">
+  <dgm:title val=""/>
+  <dgm:desc val=""/>
+  <dgm:catLst>
+    <dgm:cat type="simple" pri="10100"/>
+  </dgm:catLst>
+  <dgm:scene3d>
+    <a:camera prst="orthographicFront"/>
+    <a:lightRig rig="threePt" dir="t"/>
+  </dgm:scene3d>
+  <dgm:styleLbl name="node0">
+    <dgm:scene3d>
+      <a:camera prst="orthographicFront"/>
+      <a:lightRig rig="threePt" dir="t"/>
+    </dgm:scene3d>
+    <dgm:sp3d/>
+    <dgm:txPr/>
+    <dgm:style>
+      <a:lnRef idx="2">
+        <a:scrgbClr r="0" g="0" b="0"/>
+      </a:lnRef>
+      <a:fillRef idx="1">
+        <a:scrgbClr r="0" g="0" b="0"/>
+      </a:fillRef>
+      <a:effectRef idx="0">
+        <a:scrgbClr r="0" g="0" b="0"/>
+      </a:effectRef>
+      <a:fontRef idx="minor">
+        <a:schemeClr val="lt1"/>
+      </a:fontRef>
+    </dgm:style>
+  </dgm:styleLbl>
+  <dgm:styleLbl name="lnNode1">
+    <dgm:scene3d>
+      <a:camera prst="orthographicFront"/>
+      <a:lightRig rig="threePt" dir="t"/>
+    </dgm:scene3d>
+    <dgm:sp3d/>
+    <dgm:txPr/>
+    <dgm:style>
+      <a:lnRef idx="2">
+        <a:scrgbClr r="0" g="0" b="0"/>
+      </a:lnRef>
+      <a:fillRef idx="1">
+        <a:scrgbClr r="0" g="0" b="0"/>
+      </a:fillRef>
+      <a:effectRef idx="0">
+        <a:scrgbClr r="0" g="0" b="0"/>
+      </a:effectRef>
+      <a:fontRef idx="minor">
+        <a:schemeClr val="lt1"/>
+      </a:fontRef>
+    </dgm:style>
+  </dgm:styleLbl>
+  <dgm:styleLbl name="vennNode1">
+    <dgm:scene3d>
+      <a:camera prst="orthographicFront"/>
+      <a:lightRig rig="threePt" dir="t"/>
+    </dgm:scene3d>
+    <dgm:sp3d/>
+    <dgm:txPr/>
+    <dgm:style>
+      <a:lnRef idx="2">
+        <a:scrgbClr r="0" g="0" b="0"/>
+      </a:lnRef>
+      <a:fillRef idx="1">
+        <a:scrgbClr r="0" g="0" b="0"/>
+      </a:fillRef>
+      <a:effectRef idx="0">
+        <a:scrgbClr r="0" g="0" b="0"/>
+      </a:effectRef>
+      <a:fontRef idx="minor">
+        <a:schemeClr val="tx1"/>
+      </a:fontRef>
+    </dgm:style>
+  </dgm:styleLbl>
+  <dgm:styleLbl name="alignNode1">
+    <dgm:scene3d>
+      <a:camera prst="orthographicFront"/>
+      <a:lightRig rig="threePt" dir="t"/>
+    </dgm:scene3d>
+    <dgm:sp3d/>
+    <dgm:txPr/>
+    <dgm:style>
+      <a:lnRef idx="2">
+        <a:scrgbClr r="0" g="0" b="0"/>
+      </a:lnRef>
+      <a:fillRef idx="1">
+        <a:scrgbClr r="0" g="0" b="0"/>
+      </a:fillRef>
+      <a:effectRef idx="0">
+        <a:scrgbClr r="0" g="0" b="0"/>
+      </a:effectRef>
+      <a:fontRef idx="minor">
+        <a:schemeClr val="lt1"/>
+      </a:fontRef>
+    </dgm:style>
+  </dgm:styleLbl>
+  <dgm:styleLbl name="node1">
+    <dgm:scene3d>
+      <a:camera prst="orthographicFront"/>
+      <a:lightRig rig="threePt" dir="t"/>
+    </dgm:scene3d>
+    <dgm:sp3d/>
+    <dgm:txPr/>
+    <dgm:style>
+      <a:lnRef idx="2">
+        <a:scrgbClr r="0" g="0" b="0"/>
+      </a:lnRef>
+      <a:fillRef idx="1">
+        <a:scrgbClr r="0" g="0" b="0"/>
+      </a:fillRef>
+      <a:effectRef idx="0">
+        <a:scrgbClr r="0" g="0" b="0"/>
+      </a:effectRef>
+      <a:fontRef idx="minor">
+        <a:schemeClr val="lt1"/>
+      </a:fontRef>
+    </dgm:style>
+  </dgm:styleLbl>
+  <dgm:styleLbl name="node2">
+    <dgm:scene3d>
+      <a:camera prst="orthographicFront"/>
+      <a:lightRig rig="threePt" dir="t"/>
+    </dgm:scene3d>
+    <dgm:sp3d/>
+    <dgm:txPr/>
+    <dgm:style>
+      <a:lnRef idx="2">
+        <a:scrgbClr r="0" g="0" b="0"/>
+      </a:lnRef>
+      <a:fillRef idx="1">
+        <a:scrgbClr r="0" g="0" b="0"/>
+      </a:fillRef>
+      <a:effectRef idx="0">
+        <a:scrgbClr r="0" g="0" b="0"/>
+      </a:effectRef>
+      <a:fontRef idx="minor">
+        <a:schemeClr val="lt1"/>
+      </a:fontRef>
+    </dgm:style>
+  </dgm:styleLbl>
+  <dgm:styleLbl name="node3">
+    <dgm:scene3d>
+      <a:camera prst="orthographicFront"/>
+      <a:lightRig rig="threePt" dir="t"/>
+    </dgm:scene3d>
+    <dgm:sp3d/>
+    <dgm:txPr/>
+    <dgm:style>
+      <a:lnRef idx="2">
+        <a:scrgbClr r="0" g="0" b="0"/>
+      </a:lnRef>
+      <a:fillRef idx="1">
+        <a:scrgbClr r="0" g="0" b="0"/>
+      </a:fillRef>
+      <a:effectRef idx="0">
+        <a:scrgbClr r="0" g="0" b="0"/>
+      </a:effectRef>
+      <a:fontRef idx="minor">
+        <a:schemeClr val="lt1"/>
+      </a:fontRef>
+    </dgm:style>
+  </dgm:styleLbl>
+  <dgm:styleLbl name="node4">
+    <dgm:scene3d>
+      <a:camera prst="orthographicFront"/>
+      <a:lightRig rig="threePt" dir="t"/>
+    </dgm:scene3d>
+    <dgm:sp3d/>
+    <dgm:txPr/>
+    <dgm:style>
+      <a:lnRef idx="2">
+        <a:scrgbClr r="0" g="0" b="0"/>
+      </a:lnRef>
+      <a:fillRef idx="1">
+        <a:scrgbClr r="0" g="0" b="0"/>
+      </a:fillRef>
+      <a:effectRef idx="0">
+        <a:scrgbClr r="0" g="0" b="0"/>
+      </a:effectRef>
+      <a:fontRef idx="minor">
+        <a:schemeClr val="lt1"/>
+      </a:fontRef>
+    </dgm:style>
+  </dgm:styleLbl>
+  <dgm:styleLbl name="fgImgPlace1">
+    <dgm:scene3d>
+      <a:camera prst="orthographicFront"/>
+      <a:lightRig rig="threePt" dir="t"/>
+    </dgm:scene3d>
+    <dgm:sp3d/>
+    <dgm:txPr/>
+    <dgm:style>
+      <a:lnRef idx="2">
+        <a:scrgbClr r="0" g="0" b="0"/>
+      </a:lnRef>
+      <a:fillRef idx="1">
+        <a:scrgbClr r="0" g="0" b="0"/>
+      </a:fillRef>
+      <a:effectRef idx="0">
+        <a:scrgbClr r="0" g="0" b="0"/>
+      </a:effectRef>
+      <a:fontRef idx="minor"/>
+    </dgm:style>
+  </dgm:styleLbl>
+  <dgm:styleLbl name="alignImgPlace1">
+    <dgm:scene3d>
+      <a:camera prst="orthographicFront"/>
+      <a:lightRig rig="threePt" dir="t"/>
+    </dgm:scene3d>
+    <dgm:sp3d/>
+    <dgm:txPr/>
+    <dgm:style>
+      <a:lnRef idx="2">
+        <a:scrgbClr r="0" g="0" b="0"/>
+      </a:lnRef>
+      <a:fillRef idx="1">
+        <a:scrgbClr r="0" g="0" b="0"/>
+      </a:fillRef>
+      <a:effectRef idx="0">
+        <a:scrgbClr r="0" g="0" b="0"/>
+      </a:effectRef>
+      <a:fontRef idx="minor"/>
+    </dgm:style>
+  </dgm:styleLbl>
+  <dgm:styleLbl name="bgImgPlace1">
+    <dgm:scene3d>
+      <a:camera prst="orthographicFront"/>
+      <a:lightRig rig="threePt" dir="t"/>
+    </dgm:scene3d>
+    <dgm:sp3d/>
+    <dgm:txPr/>
+    <dgm:style>
+      <a:lnRef idx="2">
+        <a:scrgbClr r="0" g="0" b="0"/>
+      </a:lnRef>
+      <a:fillRef idx="1">
+        <a:scrgbClr r="0" g="0" b="0"/>
+      </a:fillRef>
+      <a:effectRef idx="0">
+        <a:scrgbClr r="0" g="0" b="0"/>
+      </a:effectRef>
+      <a:fontRef idx="minor"/>
+    </dgm:style>
+  </dgm:styleLbl>
+  <dgm:styleLbl name="sibTrans2D1">
+    <dgm:scene3d>
+      <a:camera prst="orthographicFront"/>
+      <a:lightRig rig="threePt" dir="t"/>
+    </dgm:scene3d>
+    <dgm:sp3d/>
+    <dgm:txPr/>
+    <dgm:style>
+      <a:lnRef idx="0">
+        <a:scrgbClr r="0" g="0" b="0"/>
+      </a:lnRef>
+      <a:fillRef idx="1">
+        <a:scrgbClr r="0" g="0" b="0"/>
+      </a:fillRef>
+      <a:effectRef idx="0">
+        <a:scrgbClr r="0" g="0" b="0"/>
+      </a:effectRef>
+      <a:fontRef idx="minor">
+        <a:schemeClr val="lt1"/>
+      </a:fontRef>
+    </dgm:style>
+  </dgm:styleLbl>
+  <dgm:styleLbl name="fgSibTrans2D1">
+    <dgm:scene3d>
+      <a:camera prst="orthographicFront"/>
+      <a:lightRig rig="threePt" dir="t"/>
+    </dgm:scene3d>
+    <dgm:sp3d/>
+    <dgm:txPr/>
+    <dgm:style>
+      <a:lnRef idx="0">
+        <a:scrgbClr r="0" g="0" b="0"/>
+      </a:lnRef>
+      <a:fillRef idx="1">
+        <a:scrgbClr r="0" g="0" b="0"/>
+      </a:fillRef>
+      <a:effectRef idx="0">
+        <a:scrgbClr r="0" g="0" b="0"/>
+      </a:effectRef>
+      <a:fontRef idx="minor">
+        <a:schemeClr val="lt1"/>
+      </a:fontRef>
+    </dgm:style>
+  </dgm:styleLbl>
+  <dgm:styleLbl name="bgSibTrans2D1">
+    <dgm:scene3d>
+      <a:camera prst="orthographicFront"/>
+      <a:lightRig rig="threePt" dir="t"/>
+    </dgm:scene3d>
+    <dgm:sp3d/>
+    <dgm:txPr/>
+    <dgm:style>
+      <a:lnRef idx="0">
+        <a:scrgbClr r="0" g="0" b="0"/>
+      </a:lnRef>
+      <a:fillRef idx="1">
+        <a:scrgbClr r="0" g="0" b="0"/>
+      </a:fillRef>
+      <a:effectRef idx="0">
+        <a:scrgbClr r="0" g="0" b="0"/>
+      </a:effectRef>
+      <a:fontRef idx="minor">
+        <a:schemeClr val="lt1"/>
+      </a:fontRef>
+    </dgm:style>
+  </dgm:styleLbl>
+  <dgm:styleLbl name="sibTrans1D1">
+    <dgm:scene3d>
+      <a:camera prst="orthographicFront"/>
+      <a:lightRig rig="threePt" dir="t"/>
+    </dgm:scene3d>
+    <dgm:sp3d/>
+    <dgm:txPr/>
+    <dgm:style>
+      <a:lnRef idx="1">
+        <a:scrgbClr r="0" g="0" b="0"/>
+      </a:lnRef>
+      <a:fillRef idx="0">
+        <a:scrgbClr r="0" g="0" b="0"/>
+      </a:fillRef>
+      <a:effectRef idx="0">
+        <a:scrgbClr r="0" g="0" b="0"/>
+      </a:effectRef>
+      <a:fontRef idx="minor"/>
+    </dgm:style>
+  </dgm:styleLbl>
+  <dgm:styleLbl name="callout">
+    <dgm:scene3d>
+      <a:camera prst="orthographicFront"/>
+      <a:lightRig rig="threePt" dir="t"/>
+    </dgm:scene3d>
+    <dgm:sp3d/>
+    <dgm:txPr/>
+    <dgm:style>
+      <a:lnRef idx="2">
+        <a:scrgbClr r="0" g="0" b="0"/>
+      </a:lnRef>
+      <a:fillRef idx="1">
+        <a:scrgbClr r="0" g="0" b="0"/>
+      </a:fillRef>
+      <a:effectRef idx="0">
+        <a:scrgbClr r="0" g="0" b="0"/>
+      </a:effectRef>
+      <a:fontRef idx="minor"/>
+    </dgm:style>
+  </dgm:styleLbl>
+  <dgm:styleLbl name="asst0">
+    <dgm:scene3d>
+      <a:camera prst="orthographicFront"/>
+      <a:lightRig rig="threePt" dir="t"/>
+    </dgm:scene3d>
+    <dgm:sp3d/>
+    <dgm:txPr/>
+    <dgm:style>
+      <a:lnRef idx="2">
+        <a:scrgbClr r="0" g="0" b="0"/>
+      </a:lnRef>
+      <a:fillRef idx="1">
+        <a:scrgbClr r="0" g="0" b="0"/>
+      </a:fillRef>
+      <a:effectRef idx="0">
+        <a:scrgbClr r="0" g="0" b="0"/>
+      </a:effectRef>
+      <a:fontRef idx="minor">
+        <a:schemeClr val="lt1"/>
+      </a:fontRef>
+    </dgm:style>
+  </dgm:styleLbl>
+  <dgm:styleLbl name="asst1">
+    <dgm:scene3d>
+      <a:camera prst="orthographicFront"/>
+      <a:lightRig rig="threePt" dir="t"/>
+    </dgm:scene3d>
+    <dgm:sp3d/>
+    <dgm:txPr/>
+    <dgm:style>
+      <a:lnRef idx="2">
+        <a:scrgbClr r="0" g="0" b="0"/>
+      </a:lnRef>
+      <a:fillRef idx="1">
+        <a:scrgbClr r="0" g="0" b="0"/>
+      </a:fillRef>
+      <a:effectRef idx="0">
+        <a:scrgbClr r="0" g="0" b="0"/>
+      </a:effectRef>
+      <a:fontRef idx="minor">
+        <a:schemeClr val="lt1"/>
+      </a:fontRef>
+    </dgm:style>
+  </dgm:styleLbl>
+  <dgm:styleLbl name="asst2">
+    <dgm:scene3d>
+      <a:camera prst="orthographicFront"/>
+      <a:lightRig rig="threePt" dir="t"/>
+    </dgm:scene3d>
+    <dgm:sp3d/>
+    <dgm:txPr/>
+    <dgm:style>
+      <a:lnRef idx="2">
+        <a:scrgbClr r="0" g="0" b="0"/>
+      </a:lnRef>
+      <a:fillRef idx="1">
+        <a:scrgbClr r="0" g="0" b="0"/>
+      </a:fillRef>
+      <a:effectRef idx="0">
+        <a:scrgbClr r="0" g="0" b="0"/>
+      </a:effectRef>
+      <a:fontRef idx="minor">
+        <a:schemeClr val="lt1"/>
+      </a:fontRef>
+    </dgm:style>
+  </dgm:styleLbl>
+  <dgm:styleLbl name="asst3">
+    <dgm:scene3d>
+      <a:camera prst="orthographicFront"/>
+      <a:lightRig rig="threePt" dir="t"/>
+    </dgm:scene3d>
+    <dgm:sp3d/>
+    <dgm:txPr/>
+    <dgm:style>
+      <a:lnRef idx="2">
+        <a:scrgbClr r="0" g="0" b="0"/>
+      </a:lnRef>
+      <a:fillRef idx="1">
+        <a:scrgbClr r="0" g="0" b="0"/>
+      </a:fillRef>
+      <a:effectRef idx="0">
+        <a:scrgbClr r="0" g="0" b="0"/>
+      </a:effectRef>
+      <a:fontRef idx="minor">
+        <a:schemeClr val="lt1"/>
+      </a:fontRef>
+    </dgm:style>
+  </dgm:styleLbl>
+  <dgm:styleLbl name="asst4">
+    <dgm:scene3d>
+      <a:camera prst="orthographicFront"/>
+      <a:lightRig rig="threePt" dir="t"/>
+    </dgm:scene3d>
+    <dgm:sp3d/>
+    <dgm:txPr/>
+    <dgm:style>
+      <a:lnRef idx="2">
+        <a:scrgbClr r="0" g="0" b="0"/>
+      </a:lnRef>
+      <a:fillRef idx="1">
+        <a:scrgbClr r="0" g="0" b="0"/>
+      </a:fillRef>
+      <a:effectRef idx="0">
+        <a:scrgbClr r="0" g="0" b="0"/>
+      </a:effectRef>
+      <a:fontRef idx="minor">
+        <a:schemeClr val="lt1"/>
+      </a:fontRef>
+    </dgm:style>
+  </dgm:styleLbl>
+  <dgm:styleLbl name="parChTrans2D1">
+    <dgm:scene3d>
+      <a:camera prst="orthographicFront"/>
+      <a:lightRig rig="threePt" dir="t"/>
+    </dgm:scene3d>
+    <dgm:sp3d/>
+    <dgm:txPr/>
+    <dgm:style>
+      <a:lnRef idx="2">
+        <a:scrgbClr r="0" g="0" b="0"/>
+      </a:lnRef>
+      <a:fillRef idx="1">
+        <a:scrgbClr r="0" g="0" b="0"/>
+      </a:fillRef>
+      <a:effectRef idx="0">
+        <a:scrgbClr r="0" g="0" b="0"/>
+      </a:effectRef>
+      <a:fontRef idx="minor">
+        <a:schemeClr val="lt1"/>
+      </a:fontRef>
+    </dgm:style>
+  </dgm:styleLbl>
+  <dgm:styleLbl name="parChTrans2D2">
+    <dgm:scene3d>
+      <a:camera prst="orthographicFront"/>
+      <a:lightRig rig="threePt" dir="t"/>
+    </dgm:scene3d>
+    <dgm:sp3d/>
+    <dgm:txPr/>
+    <dgm:style>
+      <a:lnRef idx="2">
+        <a:scrgbClr r="0" g="0" b="0"/>
+      </a:lnRef>
+      <a:fillRef idx="1">
+        <a:scrgbClr r="0" g="0" b="0"/>
+      </a:fillRef>
+      <a:effectRef idx="0">
+        <a:scrgbClr r="0" g="0" b="0"/>
+      </a:effectRef>
+      <a:fontRef idx="minor">
+        <a:schemeClr val="lt1"/>
+      </a:fontRef>
+    </dgm:style>
+  </dgm:styleLbl>
+  <dgm:styleLbl name="parChTrans2D3">
+    <dgm:scene3d>
+      <a:camera prst="orthographicFront"/>
+      <a:lightRig rig="threePt" dir="t"/>
+    </dgm:scene3d>
+    <dgm:sp3d/>
+    <dgm:txPr/>
+    <dgm:style>
+      <a:lnRef idx="2">
+        <a:scrgbClr r="0" g="0" b="0"/>
+      </a:lnRef>
+      <a:fillRef idx="1">
+        <a:scrgbClr r="0" g="0" b="0"/>
+      </a:fillRef>
+      <a:effectRef idx="0">
+        <a:scrgbClr r="0" g="0" b="0"/>
+      </a:effectRef>
+      <a:fontRef idx="minor">
+        <a:schemeClr val="lt1"/>
+      </a:fontRef>
+    </dgm:style>
+  </dgm:styleLbl>
+  <dgm:styleLbl name="parChTrans2D4">
+    <dgm:scene3d>
+      <a:camera prst="orthographicFront"/>
+      <a:lightRig rig="threePt" dir="t"/>
+    </dgm:scene3d>
+    <dgm:sp3d/>
+    <dgm:txPr/>
+    <dgm:style>
+      <a:lnRef idx="2">
+        <a:scrgbClr r="0" g="0" b="0"/>
+      </a:lnRef>
+      <a:fillRef idx="1">
+        <a:scrgbClr r="0" g="0" b="0"/>
+      </a:fillRef>
+      <a:effectRef idx="0">
+        <a:scrgbClr r="0" g="0" b="0"/>
+      </a:effectRef>
+      <a:fontRef idx="minor">
+        <a:schemeClr val="lt1"/>
+      </a:fontRef>
+    </dgm:style>
+  </dgm:styleLbl>
+  <dgm:styleLbl name="parChTrans1D1">
+    <dgm:scene3d>
+      <a:camera prst="orthographicFront"/>
+      <a:lightRig rig="threePt" dir="t"/>
+    </dgm:scene3d>
+    <dgm:sp3d/>
+    <dgm:txPr/>
+    <dgm:style>
+      <a:lnRef idx="2">
+        <a:scrgbClr r="0" g="0" b="0"/>
+      </a:lnRef>
+      <a:fillRef idx="0">
+        <a:scrgbClr r="0" g="0" b="0"/>
+      </a:fillRef>
+      <a:effectRef idx="0">
+        <a:scrgbClr r="0" g="0" b="0"/>
+      </a:effectRef>
+      <a:fontRef idx="minor"/>
+    </dgm:style>
+  </dgm:styleLbl>
+  <dgm:styleLbl name="parChTrans1D2">
+    <dgm:scene3d>
+      <a:camera prst="orthographicFront"/>
+      <a:lightRig rig="threePt" dir="t"/>
+    </dgm:scene3d>
+    <dgm:sp3d/>
+    <dgm:txPr/>
+    <dgm:style>
+      <a:lnRef idx="2">
+        <a:scrgbClr r="0" g="0" b="0"/>
+      </a:lnRef>
+      <a:fillRef idx="0">
+        <a:scrgbClr r="0" g="0" b="0"/>
+      </a:fillRef>
+      <a:effectRef idx="0">
+        <a:scrgbClr r="0" g="0" b="0"/>
+      </a:effectRef>
+      <a:fontRef idx="minor"/>
+    </dgm:style>
+  </dgm:styleLbl>
+  <dgm:styleLbl name="parChTrans1D3">
+    <dgm:scene3d>
+      <a:camera prst="orthographicFront"/>
+      <a:lightRig rig="threePt" dir="t"/>
+    </dgm:scene3d>
+    <dgm:sp3d/>
+    <dgm:txPr/>
+    <dgm:style>
+      <a:lnRef idx="2">
+        <a:scrgbClr r="0" g="0" b="0"/>
+      </a:lnRef>
+      <a:fillRef idx="0">
+        <a:scrgbClr r="0" g="0" b="0"/>
+      </a:fillRef>
+      <a:effectRef idx="0">
+        <a:scrgbClr r="0" g="0" b="0"/>
+      </a:effectRef>
+      <a:fontRef idx="minor"/>
+    </dgm:style>
+  </dgm:styleLbl>
+  <dgm:styleLbl name="parChTrans1D4">
+    <dgm:scene3d>
+      <a:camera prst="orthographicFront"/>
+      <a:lightRig rig="threePt" dir="t"/>
+    </dgm:scene3d>
+    <dgm:sp3d/>
+    <dgm:txPr/>
+    <dgm:style>
+      <a:lnRef idx="2">
+        <a:scrgbClr r="0" g="0" b="0"/>
+      </a:lnRef>
+      <a:fillRef idx="0">
+        <a:scrgbClr r="0" g="0" b="0"/>
+      </a:fillRef>
+      <a:effectRef idx="0">
+        <a:scrgbClr r="0" g="0" b="0"/>
+      </a:effectRef>
+      <a:fontRef idx="minor"/>
+    </dgm:style>
+  </dgm:styleLbl>
+  <dgm:styleLbl name="fgAcc1">
+    <dgm:scene3d>
+      <a:camera prst="orthographicFront"/>
+      <a:lightRig rig="threePt" dir="t"/>
+    </dgm:scene3d>
+    <dgm:sp3d/>
+    <dgm:txPr/>
+    <dgm:style>
+      <a:lnRef idx="2">
+        <a:scrgbClr r="0" g="0" b="0"/>
+      </a:lnRef>
+      <a:fillRef idx="1">
+        <a:scrgbClr r="0" g="0" b="0"/>
+      </a:fillRef>
+      <a:effectRef idx="0">
+        <a:scrgbClr r="0" g="0" b="0"/>
+      </a:effectRef>
+      <a:fontRef idx="minor"/>
+    </dgm:style>
+  </dgm:styleLbl>
+  <dgm:styleLbl name="conFgAcc1">
+    <dgm:scene3d>
+      <a:camera prst="orthographicFront"/>
+      <a:lightRig rig="threePt" dir="t"/>
+    </dgm:scene3d>
+    <dgm:sp3d/>
+    <dgm:txPr/>
+    <dgm:style>
+      <a:lnRef idx="2">
+        <a:scrgbClr r="0" g="0" b="0"/>
+      </a:lnRef>
+      <a:fillRef idx="1">
+        <a:scrgbClr r="0" g="0" b="0"/>
+      </a:fillRef>
+      <a:effectRef idx="0">
+        <a:scrgbClr r="0" g="0" b="0"/>
+      </a:effectRef>
+      <a:fontRef idx="minor"/>
+    </dgm:style>
+  </dgm:styleLbl>
+  <dgm:styleLbl name="alignAcc1">
+    <dgm:scene3d>
+      <a:camera prst="orthographicFront"/>
+      <a:lightRig rig="threePt" dir="t"/>
+    </dgm:scene3d>
+    <dgm:sp3d/>
+    <dgm:txPr/>
+    <dgm:style>
+      <a:lnRef idx="2">
+        <a:scrgbClr r="0" g="0" b="0"/>
+      </a:lnRef>
+      <a:fillRef idx="1">
+        <a:scrgbClr r="0" g="0" b="0"/>
+      </a:fillRef>
+      <a:effectRef idx="0">
+        <a:scrgbClr r="0" g="0" b="0"/>
+      </a:effectRef>
+      <a:fontRef idx="minor"/>
+    </dgm:style>
+  </dgm:styleLbl>
+  <dgm:styleLbl name="trAlignAcc1">
+    <dgm:scene3d>
+      <a:camera prst="orthographicFront"/>
+      <a:lightRig rig="threePt" dir="t"/>
+    </dgm:scene3d>
+    <dgm:sp3d/>
+    <dgm:txPr/>
+    <dgm:style>
+      <a:lnRef idx="1">
+        <a:scrgbClr r="0" g="0" b="0"/>
+      </a:lnRef>
+      <a:fillRef idx="1">
+        <a:scrgbClr r="0" g="0" b="0"/>
+      </a:fillRef>
+      <a:effectRef idx="0">
+        <a:scrgbClr r="0" g="0" b="0"/>
+      </a:effectRef>
+      <a:fontRef idx="minor"/>
+    </dgm:style>
+  </dgm:styleLbl>
+  <dgm:styleLbl name="bgAcc1">
+    <dgm:scene3d>
+      <a:camera prst="orthographicFront"/>
+      <a:lightRig rig="threePt" dir="t"/>
+    </dgm:scene3d>
+    <dgm:sp3d/>
+    <dgm:txPr/>
+    <dgm:style>
+      <a:lnRef idx="2">
+        <a:scrgbClr r="0" g="0" b="0"/>
+      </a:lnRef>
+      <a:fillRef idx="1">
+        <a:scrgbClr r="0" g="0" b="0"/>
+      </a:fillRef>
+      <a:effectRef idx="0">
+        <a:scrgbClr r="0" g="0" b="0"/>
+      </a:effectRef>
+      <a:fontRef idx="minor"/>
+    </dgm:style>
+  </dgm:styleLbl>
+  <dgm:styleLbl name="solidFgAcc1">
+    <dgm:scene3d>
+      <a:camera prst="orthographicFront"/>
+      <a:lightRig rig="threePt" dir="t"/>
+    </dgm:scene3d>
+    <dgm:sp3d/>
+    <dgm:txPr/>
+    <dgm:style>
+      <a:lnRef idx="2">
+        <a:scrgbClr r="0" g="0" b="0"/>
+      </a:lnRef>
+      <a:fillRef idx="1">
+        <a:scrgbClr r="0" g="0" b="0"/>
+      </a:fillRef>
+      <a:effectRef idx="0">
+        <a:scrgbClr r="0" g="0" b="0"/>
+      </a:effectRef>
+      <a:fontRef idx="minor"/>
+    </dgm:style>
+  </dgm:styleLbl>
+  <dgm:styleLbl name="solidAlignAcc1">
+    <dgm:scene3d>
+      <a:camera prst="orthographicFront"/>
+      <a:lightRig rig="threePt" dir="t"/>
+    </dgm:scene3d>
+    <dgm:sp3d/>
+    <dgm:txPr/>
+    <dgm:style>
+      <a:lnRef idx="2">
+        <a:scrgbClr r="0" g="0" b="0"/>
+      </a:lnRef>
+      <a:fillRef idx="1">
+        <a:scrgbClr r="0" g="0" b="0"/>
+      </a:fillRef>
+      <a:effectRef idx="0">
+        <a:scrgbClr r="0" g="0" b="0"/>
+      </a:effectRef>
+      <a:fontRef idx="minor"/>
+    </dgm:style>
+  </dgm:styleLbl>
+  <dgm:styleLbl name="solidBgAcc1">
+    <dgm:scene3d>
+      <a:camera prst="orthographicFront"/>
+      <a:lightRig rig="threePt" dir="t"/>
+    </dgm:scene3d>
+    <dgm:sp3d/>
+    <dgm:txPr/>
+    <dgm:style>
+      <a:lnRef idx="2">
+        <a:scrgbClr r="0" g="0" b="0"/>
+      </a:lnRef>
+      <a:fillRef idx="1">
+        <a:scrgbClr r="0" g="0" b="0"/>
+      </a:fillRef>
+      <a:effectRef idx="0">
+        <a:scrgbClr r="0" g="0" b="0"/>
+      </a:effectRef>
+      <a:fontRef idx="minor"/>
+    </dgm:style>
+  </dgm:styleLbl>
+  <dgm:styleLbl name="fgAccFollowNode1">
+    <dgm:scene3d>
+      <a:camera prst="orthographicFront"/>
+      <a:lightRig rig="threePt" dir="t"/>
+    </dgm:scene3d>
+    <dgm:sp3d/>
+    <dgm:txPr/>
+    <dgm:style>
+      <a:lnRef idx="2">
+        <a:scrgbClr r="0" g="0" b="0"/>
+      </a:lnRef>
+      <a:fillRef idx="1">
+        <a:scrgbClr r="0" g="0" b="0"/>
+      </a:fillRef>
+      <a:effectRef idx="0">
+        <a:scrgbClr r="0" g="0" b="0"/>
+      </a:effectRef>
+      <a:fontRef idx="minor"/>
+    </dgm:style>
+  </dgm:styleLbl>
+  <dgm:styleLbl name="alignAccFollowNode1">
+    <dgm:scene3d>
+      <a:camera prst="orthographicFront"/>
+      <a:lightRig rig="threePt" dir="t"/>
+    </dgm:scene3d>
+    <dgm:sp3d/>
+    <dgm:txPr/>
+    <dgm:style>
+      <a:lnRef idx="2">
+        <a:scrgbClr r="0" g="0" b="0"/>
+      </a:lnRef>
+      <a:fillRef idx="1">
+        <a:scrgbClr r="0" g="0" b="0"/>
+      </a:fillRef>
+      <a:effectRef idx="0">
+        <a:scrgbClr r="0" g="0" b="0"/>
+      </a:effectRef>
+      <a:fontRef idx="minor"/>
+    </dgm:style>
+  </dgm:styleLbl>
+  <dgm:styleLbl name="bgAccFollowNode1">
+    <dgm:scene3d>
+      <a:camera prst="orthographicFront"/>
+      <a:lightRig rig="threePt" dir="t"/>
+    </dgm:scene3d>
+    <dgm:sp3d/>
+    <dgm:txPr/>
+    <dgm:style>
+      <a:lnRef idx="2">
+        <a:scrgbClr r="0" g="0" b="0"/>
+      </a:lnRef>
+      <a:fillRef idx="1">
+        <a:scrgbClr r="0" g="0" b="0"/>
+      </a:fillRef>
+      <a:effectRef idx="0">
+        <a:scrgbClr r="0" g="0" b="0"/>
+      </a:effectRef>
+      <a:fontRef idx="minor"/>
+    </dgm:style>
+  </dgm:styleLbl>
+  <dgm:styleLbl name="fgAcc0">
+    <dgm:scene3d>
+      <a:camera prst="orthographicFront"/>
+      <a:lightRig rig="threePt" dir="t"/>
+    </dgm:scene3d>
+    <dgm:sp3d/>
+    <dgm:txPr/>
+    <dgm:style>
+      <a:lnRef idx="2">
+        <a:scrgbClr r="0" g="0" b="0"/>
+      </a:lnRef>
+      <a:fillRef idx="1">
+        <a:scrgbClr r="0" g="0" b="0"/>
+      </a:fillRef>
+      <a:effectRef idx="0">
+        <a:scrgbClr r="0" g="0" b="0"/>
+      </a:effectRef>
+      <a:fontRef idx="minor"/>
+    </dgm:style>
+  </dgm:styleLbl>
+  <dgm:styleLbl name="fgAcc2">
+    <dgm:scene3d>
+      <a:camera prst="orthographicFront"/>
+      <a:lightRig rig="threePt" dir="t"/>
+    </dgm:scene3d>
+    <dgm:sp3d/>
+    <dgm:txPr/>
+    <dgm:style>
+      <a:lnRef idx="2">
+        <a:scrgbClr r="0" g="0" b="0"/>
+      </a:lnRef>
+      <a:fillRef idx="1">
+        <a:scrgbClr r="0" g="0" b="0"/>
+      </a:fillRef>
+      <a:effectRef idx="0">
+        <a:scrgbClr r="0" g="0" b="0"/>
+      </a:effectRef>
+      <a:fontRef idx="minor"/>
+    </dgm:style>
+  </dgm:styleLbl>
+  <dgm:styleLbl name="fgAcc3">
+    <dgm:scene3d>
+      <a:camera prst="orthographicFront"/>
+      <a:lightRig rig="threePt" dir="t"/>
+    </dgm:scene3d>
+    <dgm:sp3d/>
+    <dgm:txPr/>
+    <dgm:style>
+      <a:lnRef idx="2">
+        <a:scrgbClr r="0" g="0" b="0"/>
+      </a:lnRef>
+      <a:fillRef idx="1">
+        <a:scrgbClr r="0" g="0" b="0"/>
+      </a:fillRef>
+      <a:effectRef idx="0">
+        <a:scrgbClr r="0" g="0" b="0"/>
+      </a:effectRef>
+      <a:fontRef idx="minor"/>
+    </dgm:style>
+  </dgm:styleLbl>
+  <dgm:styleLbl name="fgAcc4">
+    <dgm:scene3d>
+      <a:camera prst="orthographicFront"/>
+      <a:lightRig rig="threePt" dir="t"/>
+    </dgm:scene3d>
+    <dgm:sp3d/>
+    <dgm:txPr/>
+    <dgm:style>
+      <a:lnRef idx="2">
+        <a:scrgbClr r="0" g="0" b="0"/>
+      </a:lnRef>
+      <a:fillRef idx="1">
+        <a:scrgbClr r="0" g="0" b="0"/>
+      </a:fillRef>
+      <a:effectRef idx="0">
+        <a:scrgbClr r="0" g="0" b="0"/>
+      </a:effectRef>
+      <a:fontRef idx="minor"/>
+    </dgm:style>
+  </dgm:styleLbl>
+  <dgm:styleLbl name="bgShp">
+    <dgm:scene3d>
+      <a:camera prst="orthographicFront"/>
+      <a:lightRig rig="threePt" dir="t"/>
+    </dgm:scene3d>
+    <dgm:sp3d/>
+    <dgm:txPr/>
+    <dgm:style>
+      <a:lnRef idx="0">
+        <a:scrgbClr r="0" g="0" b="0"/>
+      </a:lnRef>
+      <a:fillRef idx="1">
+        <a:scrgbClr r="0" g="0" b="0"/>
+      </a:fillRef>
+      <a:effectRef idx="0">
+        <a:scrgbClr r="0" g="0" b="0"/>
+      </a:effectRef>
+      <a:fontRef idx="minor"/>
+    </dgm:style>
+  </dgm:styleLbl>
+  <dgm:styleLbl name="dkBgShp">
+    <dgm:scene3d>
+      <a:camera prst="orthographicFront"/>
+      <a:lightRig rig="threePt" dir="t"/>
+    </dgm:scene3d>
+    <dgm:sp3d/>
+    <dgm:txPr/>
+    <dgm:style>
+      <a:lnRef idx="0">
+        <a:scrgbClr r="0" g="0" b="0"/>
+      </a:lnRef>
+      <a:fillRef idx="1">
+        <a:scrgbClr r="0" g="0" b="0"/>
+      </a:fillRef>
+      <a:effectRef idx="0">
+        <a:scrgbClr r="0" g="0" b="0"/>
+      </a:effectRef>
+      <a:fontRef idx="minor"/>
+    </dgm:style>
+  </dgm:styleLbl>
+  <dgm:styleLbl name="trBgShp">
+    <dgm:scene3d>
+      <a:camera prst="orthographicFront"/>
+      <a:lightRig rig="threePt" dir="t"/>
+    </dgm:scene3d>
+    <dgm:sp3d/>
+    <dgm:txPr/>
+    <dgm:style>
+      <a:lnRef idx="0">
+        <a:scrgbClr r="0" g="0" b="0"/>
+      </a:lnRef>
+      <a:fillRef idx="1">
+        <a:scrgbClr r="0" g="0" b="0"/>
+      </a:fillRef>
+      <a:effectRef idx="0">
+        <a:scrgbClr r="0" g="0" b="0"/>
+      </a:effectRef>
+      <a:fontRef idx="minor"/>
+    </dgm:style>
+  </dgm:styleLbl>
+  <dgm:styleLbl name="fgShp">
+    <dgm:scene3d>
+      <a:camera prst="orthographicFront"/>
+      <a:lightRig rig="threePt" dir="t"/>
+    </dgm:scene3d>
+    <dgm:sp3d/>
+    <dgm:txPr/>
+    <dgm:style>
+      <a:lnRef idx="2">
+        <a:scrgbClr r="0" g="0" b="0"/>
+      </a:lnRef>
+      <a:fillRef idx="1">
+        <a:scrgbClr r="0" g="0" b="0"/>
+      </a:fillRef>
+      <a:effectRef idx="0">
+        <a:scrgbClr r="0" g="0" b="0"/>
+      </a:effectRef>
+      <a:fontRef idx="minor"/>
+    </dgm:style>
+  </dgm:styleLbl>
+  <dgm:styleLbl name="revTx">
+    <dgm:scene3d>
+      <a:camera prst="orthographicFront"/>
+      <a:lightRig rig="threePt" dir="t"/>
+    </dgm:scene3d>
+    <dgm:sp3d/>
+    <dgm:txPr/>
+    <dgm:style>
+      <a:lnRef idx="0">
+        <a:scrgbClr r="0" g="0" b="0"/>
+      </a:lnRef>
+      <a:fillRef idx="0">
+        <a:scrgbClr r="0" g="0" b="0"/>
+      </a:fillRef>
+      <a:effectRef idx="0">
+        <a:scrgbClr r="0" g="0" b="0"/>
+      </a:effectRef>
+      <a:fontRef idx="minor"/>
+    </dgm:style>
+  </dgm:styleLbl>
+</dgm:styleDef>
 </file>
 
 <file path=ppt/handoutMasters/handoutMaster1.xml><?xml version="1.0" encoding="utf-8"?>
@@ -1407,7 +3709,7 @@
           <a:p>
             <a:fld id="{0B12D154-6756-477F-ACF6-75A5A1CA1461}" type="datetime1">
               <a:rPr lang="nl-NL" altLang="nl-NL" smtClean="0"/>
-              <a:t>13-4-2026</a:t>
+              <a:t>14-4-2026</a:t>
             </a:fld>
             <a:endParaRPr lang="en-US" altLang="nl-NL"/>
           </a:p>
@@ -1567,7 +3869,7 @@
             <a:fld id="{80582700-5991-49A4-A0D5-6241D3A3416A}" type="slidenum">
               <a:rPr lang="en-US" altLang="nl-NL"/>
               <a:pPr/>
-              <a:t>‹nr.›</a:t>
+              <a:t>‹#›</a:t>
             </a:fld>
             <a:endParaRPr lang="en-US" altLang="nl-NL"/>
           </a:p>
@@ -1763,7 +4065,7 @@
           <a:p>
             <a:fld id="{2802B35E-981B-4772-B04D-75CC2431A8B0}" type="datetime1">
               <a:rPr lang="nl-NL" altLang="nl-NL" smtClean="0"/>
-              <a:t>13-4-2026</a:t>
+              <a:t>14-4-2026</a:t>
             </a:fld>
             <a:endParaRPr lang="en-US" altLang="nl-NL"/>
           </a:p>
@@ -2070,7 +4372,7 @@
             <a:fld id="{BB22E908-7DBC-4D32-B654-1FA166BAB2FA}" type="slidenum">
               <a:rPr lang="en-US" altLang="nl-NL"/>
               <a:pPr/>
-              <a:t>‹nr.›</a:t>
+              <a:t>‹#›</a:t>
             </a:fld>
             <a:endParaRPr lang="en-US" altLang="nl-NL"/>
           </a:p>
@@ -2851,7 +5153,7 @@
           <a:p>
             <a:fld id="{8C6C149D-137E-44EB-92E8-E75D297EEADF}" type="datetime1">
               <a:rPr lang="nl-NL" altLang="nl-NL" smtClean="0"/>
-              <a:t>13-4-2026</a:t>
+              <a:t>14-4-2026</a:t>
             </a:fld>
             <a:endParaRPr lang="en-US" altLang="nl-NL"/>
           </a:p>
@@ -3063,7 +5365,7 @@
           <a:p>
             <a:fld id="{8C6C149D-137E-44EB-92E8-E75D297EEADF}" type="datetime1">
               <a:rPr lang="nl-NL" altLang="nl-NL" smtClean="0"/>
-              <a:t>13-4-2026</a:t>
+              <a:t>14-4-2026</a:t>
             </a:fld>
             <a:endParaRPr lang="en-US" altLang="nl-NL"/>
           </a:p>
@@ -3275,7 +5577,7 @@
           <a:p>
             <a:fld id="{8C6C149D-137E-44EB-92E8-E75D297EEADF}" type="datetime1">
               <a:rPr lang="nl-NL" altLang="nl-NL" smtClean="0"/>
-              <a:t>13-4-2026</a:t>
+              <a:t>14-4-2026</a:t>
             </a:fld>
             <a:endParaRPr lang="en-US" altLang="nl-NL"/>
           </a:p>
@@ -3487,7 +5789,7 @@
           <a:p>
             <a:fld id="{8C6C149D-137E-44EB-92E8-E75D297EEADF}" type="datetime1">
               <a:rPr lang="nl-NL" altLang="nl-NL" smtClean="0"/>
-              <a:t>13-4-2026</a:t>
+              <a:t>14-4-2026</a:t>
             </a:fld>
             <a:endParaRPr lang="en-US" altLang="nl-NL"/>
           </a:p>
@@ -3696,7 +5998,7 @@
           <a:p>
             <a:fld id="{8C6C149D-137E-44EB-92E8-E75D297EEADF}" type="datetime1">
               <a:rPr lang="nl-NL" altLang="nl-NL" smtClean="0"/>
-              <a:t>13-4-2026</a:t>
+              <a:t>14-4-2026</a:t>
             </a:fld>
             <a:endParaRPr lang="en-US" altLang="nl-NL"/>
           </a:p>
@@ -5325,7 +7627,7 @@
             <a:fld id="{82F1406F-2017-4431-B79A-7DFC81A4E36B}" type="slidenum">
               <a:rPr lang="nl-NL" smtClean="0"/>
               <a:pPr/>
-              <a:t>‹nr.›</a:t>
+              <a:t>‹#›</a:t>
             </a:fld>
             <a:endParaRPr lang="nl-NL"/>
           </a:p>
@@ -5661,7 +7963,7 @@
             <a:fld id="{82F1406F-2017-4431-B79A-7DFC81A4E36B}" type="slidenum">
               <a:rPr lang="nl-NL" smtClean="0"/>
               <a:pPr/>
-              <a:t>‹nr.›</a:t>
+              <a:t>‹#›</a:t>
             </a:fld>
             <a:endParaRPr lang="nl-NL"/>
           </a:p>
@@ -5978,7 +8280,7 @@
             <a:fld id="{82F1406F-2017-4431-B79A-7DFC81A4E36B}" type="slidenum">
               <a:rPr lang="nl-NL" smtClean="0"/>
               <a:pPr/>
-              <a:t>‹nr.›</a:t>
+              <a:t>‹#›</a:t>
             </a:fld>
             <a:endParaRPr lang="nl-NL"/>
           </a:p>
@@ -6334,7 +8636,7 @@
             <a:fld id="{82F1406F-2017-4431-B79A-7DFC81A4E36B}" type="slidenum">
               <a:rPr lang="nl-NL" smtClean="0"/>
               <a:pPr/>
-              <a:t>‹nr.›</a:t>
+              <a:t>‹#›</a:t>
             </a:fld>
             <a:endParaRPr lang="nl-NL"/>
           </a:p>
@@ -6596,7 +8898,7 @@
             <a:fld id="{82F1406F-2017-4431-B79A-7DFC81A4E36B}" type="slidenum">
               <a:rPr lang="nl-NL" smtClean="0"/>
               <a:pPr/>
-              <a:t>‹nr.›</a:t>
+              <a:t>‹#›</a:t>
             </a:fld>
             <a:endParaRPr lang="nl-NL"/>
           </a:p>
@@ -6938,7 +9240,7 @@
             <a:fld id="{82F1406F-2017-4431-B79A-7DFC81A4E36B}" type="slidenum">
               <a:rPr lang="nl-NL" smtClean="0"/>
               <a:pPr/>
-              <a:t>‹nr.›</a:t>
+              <a:t>‹#›</a:t>
             </a:fld>
             <a:endParaRPr lang="nl-NL"/>
           </a:p>
@@ -7231,7 +9533,7 @@
             <a:fld id="{82F1406F-2017-4431-B79A-7DFC81A4E36B}" type="slidenum">
               <a:rPr lang="nl-NL" smtClean="0"/>
               <a:pPr/>
-              <a:t>‹nr.›</a:t>
+              <a:t>‹#›</a:t>
             </a:fld>
             <a:endParaRPr lang="nl-NL"/>
           </a:p>
@@ -7541,7 +9843,7 @@
             <a:fld id="{82F1406F-2017-4431-B79A-7DFC81A4E36B}" type="slidenum">
               <a:rPr lang="nl-NL" smtClean="0"/>
               <a:pPr/>
-              <a:t>‹nr.›</a:t>
+              <a:t>‹#›</a:t>
             </a:fld>
             <a:endParaRPr lang="nl-NL"/>
           </a:p>
@@ -7804,7 +10106,7 @@
             <a:fld id="{82F1406F-2017-4431-B79A-7DFC81A4E36B}" type="slidenum">
               <a:rPr lang="nl-NL" smtClean="0"/>
               <a:pPr/>
-              <a:t>‹nr.›</a:t>
+              <a:t>‹#›</a:t>
             </a:fld>
             <a:endParaRPr lang="nl-NL"/>
           </a:p>
@@ -8445,7 +10747,7 @@
             <a:fld id="{82F1406F-2017-4431-B79A-7DFC81A4E36B}" type="slidenum">
               <a:rPr lang="nl-NL" smtClean="0"/>
               <a:pPr/>
-              <a:t>‹nr.›</a:t>
+              <a:t>‹#›</a:t>
             </a:fld>
             <a:endParaRPr lang="nl-NL"/>
           </a:p>
@@ -8611,7 +10913,7 @@
             <a:fld id="{82F1406F-2017-4431-B79A-7DFC81A4E36B}" type="slidenum">
               <a:rPr lang="nl-NL" smtClean="0"/>
               <a:pPr/>
-              <a:t>‹nr.›</a:t>
+              <a:t>‹#›</a:t>
             </a:fld>
             <a:endParaRPr lang="nl-NL"/>
           </a:p>
@@ -8896,7 +11198,7 @@
             <a:fld id="{82F1406F-2017-4431-B79A-7DFC81A4E36B}" type="slidenum">
               <a:rPr lang="nl-NL" smtClean="0"/>
               <a:pPr/>
-              <a:t>‹nr.›</a:t>
+              <a:t>‹#›</a:t>
             </a:fld>
             <a:endParaRPr lang="nl-NL"/>
           </a:p>
@@ -9054,7 +11356,7 @@
             <a:fld id="{82F1406F-2017-4431-B79A-7DFC81A4E36B}" type="slidenum">
               <a:rPr lang="nl-NL" smtClean="0"/>
               <a:pPr/>
-              <a:t>‹nr.›</a:t>
+              <a:t>‹#›</a:t>
             </a:fld>
             <a:endParaRPr lang="nl-NL"/>
           </a:p>
@@ -9311,7 +11613,7 @@
           <a:p>
             <a:fld id="{378DF747-8C7E-42F0-ABD7-47587DAC082D}" type="slidenum">
               <a:rPr lang="en-US" smtClean="0"/>
-              <a:t>‹nr.›</a:t>
+              <a:t>‹#›</a:t>
             </a:fld>
             <a:endParaRPr lang="en-US"/>
           </a:p>
@@ -9535,7 +11837,7 @@
           <a:p>
             <a:fld id="{378DF747-8C7E-42F0-ABD7-47587DAC082D}" type="slidenum">
               <a:rPr lang="en-US" smtClean="0"/>
-              <a:t>‹nr.›</a:t>
+              <a:t>‹#›</a:t>
             </a:fld>
             <a:endParaRPr lang="en-US"/>
           </a:p>
@@ -14762,7 +17064,7 @@
             <a:fld id="{82F1406F-2017-4431-B79A-7DFC81A4E36B}" type="slidenum">
               <a:rPr lang="nl-NL" smtClean="0"/>
               <a:pPr/>
-              <a:t>‹nr.›</a:t>
+              <a:t>‹#›</a:t>
             </a:fld>
             <a:endParaRPr lang="nl-NL"/>
           </a:p>
@@ -15108,7 +17410,7 @@
             <a:fld id="{82F1406F-2017-4431-B79A-7DFC81A4E36B}" type="slidenum">
               <a:rPr lang="nl-NL" smtClean="0"/>
               <a:pPr/>
-              <a:t>‹nr.›</a:t>
+              <a:t>‹#›</a:t>
             </a:fld>
             <a:endParaRPr lang="nl-NL"/>
           </a:p>
@@ -15410,7 +17712,7 @@
             <a:fld id="{82F1406F-2017-4431-B79A-7DFC81A4E36B}" type="slidenum">
               <a:rPr lang="nl-NL" smtClean="0"/>
               <a:pPr/>
-              <a:t>‹nr.›</a:t>
+              <a:t>‹#›</a:t>
             </a:fld>
             <a:endParaRPr lang="nl-NL"/>
           </a:p>
@@ -15679,7 +17981,7 @@
             <a:fld id="{82F1406F-2017-4431-B79A-7DFC81A4E36B}" type="slidenum">
               <a:rPr lang="nl-NL" smtClean="0"/>
               <a:pPr/>
-              <a:t>‹nr.›</a:t>
+              <a:t>‹#›</a:t>
             </a:fld>
             <a:endParaRPr lang="nl-NL"/>
           </a:p>
@@ -15823,7 +18125,7 @@
             <a:fld id="{82F1406F-2017-4431-B79A-7DFC81A4E36B}" type="slidenum">
               <a:rPr lang="nl-NL" smtClean="0"/>
               <a:pPr/>
-              <a:t>‹nr.›</a:t>
+              <a:t>‹#›</a:t>
             </a:fld>
             <a:endParaRPr lang="nl-NL"/>
           </a:p>
@@ -15952,7 +18254,7 @@
             <a:fld id="{82F1406F-2017-4431-B79A-7DFC81A4E36B}" type="slidenum">
               <a:rPr lang="nl-NL" smtClean="0"/>
               <a:pPr/>
-              <a:t>‹nr.›</a:t>
+              <a:t>‹#›</a:t>
             </a:fld>
             <a:endParaRPr lang="nl-NL"/>
           </a:p>
@@ -16386,7 +18688,7 @@
             <a:fld id="{82F1406F-2017-4431-B79A-7DFC81A4E36B}" type="slidenum">
               <a:rPr lang="nl-NL" smtClean="0"/>
               <a:pPr/>
-              <a:t>‹nr.›</a:t>
+              <a:t>‹#›</a:t>
             </a:fld>
             <a:endParaRPr lang="nl-NL"/>
           </a:p>
@@ -16722,7 +19024,7 @@
             <a:fld id="{82F1406F-2017-4431-B79A-7DFC81A4E36B}" type="slidenum">
               <a:rPr lang="nl-NL" smtClean="0"/>
               <a:pPr/>
-              <a:t>‹nr.›</a:t>
+              <a:t>‹#›</a:t>
             </a:fld>
             <a:endParaRPr lang="nl-NL"/>
           </a:p>
@@ -17878,6 +20180,15 @@
           <a:solidFill>
             <a:srgbClr val="FFFFFF"/>
           </a:solidFill>
+          <a:extLst>
+            <a:ext uri="{909E8E84-426E-40DD-AFC4-6F175D3DCCD1}">
+              <a14:hiddenFill xmlns:a14="http://schemas.microsoft.com/office/drawing/2010/main">
+                <a:solidFill>
+                  <a:srgbClr val="FFFFFF"/>
+                </a:solidFill>
+              </a14:hiddenFill>
+            </a:ext>
+          </a:extLst>
         </p:spPr>
       </p:pic>
       <p:sp>
@@ -19907,15 +22218,6 @@
           <a:solidFill>
             <a:srgbClr val="FFFFFF"/>
           </a:solidFill>
-          <a:extLst>
-            <a:ext uri="{909E8E84-426E-40DD-AFC4-6F175D3DCCD1}">
-              <a14:hiddenFill xmlns:a14="http://schemas.microsoft.com/office/drawing/2010/main">
-                <a:solidFill>
-                  <a:srgbClr val="FFFFFF"/>
-                </a:solidFill>
-              </a14:hiddenFill>
-            </a:ext>
-          </a:extLst>
         </p:spPr>
       </p:pic>
       <p:sp>
@@ -20851,15 +23153,6 @@
           <a:solidFill>
             <a:srgbClr val="FFFFFF"/>
           </a:solidFill>
-          <a:extLst>
-            <a:ext uri="{909E8E84-426E-40DD-AFC4-6F175D3DCCD1}">
-              <a14:hiddenFill xmlns:a14="http://schemas.microsoft.com/office/drawing/2010/main">
-                <a:solidFill>
-                  <a:srgbClr val="FFFFFF"/>
-                </a:solidFill>
-              </a14:hiddenFill>
-            </a:ext>
-          </a:extLst>
         </p:spPr>
       </p:pic>
       <p:sp>
@@ -20987,9 +23280,16 @@
             <p:ph type="title"/>
           </p:nvPr>
         </p:nvSpPr>
-        <p:spPr/>
+        <p:spPr>
+          <a:xfrm>
+            <a:off x="972072" y="325969"/>
+            <a:ext cx="9924529" cy="1325033"/>
+          </a:xfrm>
+        </p:spPr>
         <p:txBody>
-          <a:bodyPr/>
+          <a:bodyPr anchor="ctr">
+            <a:normAutofit/>
+          </a:bodyPr>
           <a:lstStyle/>
           <a:p>
             <a:r>
@@ -21007,48 +23307,37 @@
           </a:p>
         </p:txBody>
       </p:sp>
-      <p:sp>
-        <p:nvSpPr>
-          <p:cNvPr id="3" name="Tijdelijke aanduiding voor inhoud 2">
+      <p:graphicFrame>
+        <p:nvGraphicFramePr>
+          <p:cNvPr id="5" name="Tijdelijke aanduiding voor inhoud 2">
             <a:extLst>
               <a:ext uri="{FF2B5EF4-FFF2-40B4-BE49-F238E27FC236}">
-                <a16:creationId xmlns:a16="http://schemas.microsoft.com/office/drawing/2014/main" id="{4CDF2244-03DA-D8A8-48DD-5966848ADC28}"/>
+                <a16:creationId xmlns:a16="http://schemas.microsoft.com/office/drawing/2014/main" id="{A6A10956-DE85-423A-15F9-3ED2E8F03AAF}"/>
               </a:ext>
             </a:extLst>
           </p:cNvPr>
-          <p:cNvSpPr>
-            <a:spLocks noGrp="1"/>
-          </p:cNvSpPr>
+          <p:cNvGraphicFramePr>
+            <a:graphicFrameLocks noGrp="1"/>
+          </p:cNvGraphicFramePr>
           <p:nvPr>
             <p:ph sz="quarter" idx="15"/>
+            <p:extLst>
+              <p:ext uri="{D42A27DB-BD31-4B8C-83A1-F6EECF244321}">
+                <p14:modId xmlns:p14="http://schemas.microsoft.com/office/powerpoint/2010/main" val="1101047328"/>
+              </p:ext>
+            </p:extLst>
           </p:nvPr>
-        </p:nvSpPr>
-        <p:spPr/>
-        <p:txBody>
-          <a:bodyPr/>
-          <a:lstStyle/>
-          <a:p>
-            <a:r>
-              <a:rPr lang="nl-NL" dirty="0"/>
-              <a:t>Hoe ‘OO’ is jouw code?</a:t>
-            </a:r>
-          </a:p>
-          <a:p>
-            <a:r>
-              <a:rPr lang="nl-NL" dirty="0"/>
-              <a:t>Kunnen design </a:t>
-            </a:r>
-            <a:r>
-              <a:rPr lang="nl-NL" dirty="0" err="1"/>
-              <a:t>patterns</a:t>
-            </a:r>
-            <a:r>
-              <a:rPr lang="nl-NL" dirty="0"/>
-              <a:t> je code mooier maken?</a:t>
-            </a:r>
-          </a:p>
-        </p:txBody>
-      </p:sp>
+        </p:nvGraphicFramePr>
+        <p:xfrm>
+          <a:off x="971552" y="1797051"/>
+          <a:ext cx="9925049" cy="4080933"/>
+        </p:xfrm>
+        <a:graphic>
+          <a:graphicData uri="http://schemas.openxmlformats.org/drawingml/2006/diagram">
+            <dgm:relIds xmlns:dgm="http://schemas.openxmlformats.org/drawingml/2006/diagram" xmlns:r="http://schemas.openxmlformats.org/officeDocument/2006/relationships" r:dm="rId2" r:lo="rId3" r:qs="rId4" r:cs="rId5"/>
+          </a:graphicData>
+        </a:graphic>
+      </p:graphicFrame>
     </p:spTree>
     <p:extLst>
       <p:ext uri="{BB962C8B-B14F-4D97-AF65-F5344CB8AC3E}">
@@ -21114,11 +23403,18 @@
           <a:lstStyle/>
           <a:p>
             <a:r>
+              <a:rPr lang="nl-NL" sz="6600" dirty="0">
+                <a:latin typeface="Verdana" panose="020B0604030504040204" pitchFamily="34" charset="0"/>
+                <a:ea typeface="Verdana" panose="020B0604030504040204" pitchFamily="34" charset="0"/>
+              </a:rPr>
+              <a:t>\</a:t>
+            </a:r>
+            <a:r>
               <a:rPr lang="nl-NL" sz="6600" b="1" kern="1200" dirty="0">
                 <a:latin typeface="Verdana" panose="020B0604030504040204" pitchFamily="34" charset="0"/>
                 <a:ea typeface="Verdana" panose="020B0604030504040204" pitchFamily="34" charset="0"/>
               </a:rPr>
-              <a:t>/0</a:t>
+              <a:t>0</a:t>
             </a:r>
           </a:p>
         </p:txBody>
@@ -21654,46 +23950,46 @@
               </a:spcAft>
             </a:pPr>
             <a:r>
-              <a:rPr lang="en-US" sz="2100" dirty="0"/>
+              <a:rPr lang="en-US" sz="2100"/>
               <a:t>‘</a:t>
             </a:r>
             <a:r>
-              <a:rPr lang="en-US" sz="2100" dirty="0" err="1"/>
+              <a:rPr lang="en-US" sz="2100" err="1"/>
               <a:t>Standaard</a:t>
             </a:r>
             <a:r>
-              <a:rPr lang="en-US" sz="2100" dirty="0"/>
+              <a:rPr lang="en-US" sz="2100"/>
               <a:t>’ </a:t>
             </a:r>
             <a:r>
-              <a:rPr lang="en-US" sz="2100" dirty="0" err="1"/>
+              <a:rPr lang="en-US" sz="2100" err="1"/>
               <a:t>oplossing</a:t>
             </a:r>
             <a:r>
-              <a:rPr lang="en-US" sz="2100" dirty="0"/>
+              <a:rPr lang="en-US" sz="2100"/>
               <a:t> </a:t>
             </a:r>
             <a:r>
-              <a:rPr lang="en-US" sz="2100" dirty="0" err="1"/>
+              <a:rPr lang="en-US" sz="2100" err="1"/>
               <a:t>voor</a:t>
             </a:r>
             <a:r>
-              <a:rPr lang="en-US" sz="2100" dirty="0"/>
+              <a:rPr lang="en-US" sz="2100"/>
               <a:t> </a:t>
             </a:r>
             <a:r>
-              <a:rPr lang="en-US" sz="2100" dirty="0" err="1"/>
+              <a:rPr lang="en-US" sz="2100" err="1"/>
               <a:t>veelkomende</a:t>
             </a:r>
             <a:r>
-              <a:rPr lang="en-US" sz="2100" dirty="0"/>
+              <a:rPr lang="en-US" sz="2100"/>
               <a:t> </a:t>
             </a:r>
             <a:r>
-              <a:rPr lang="en-US" sz="2100" dirty="0" err="1"/>
+              <a:rPr lang="en-US" sz="2100" err="1"/>
               <a:t>problemen</a:t>
             </a:r>
-            <a:endParaRPr lang="en-US" sz="2100" dirty="0"/>
+            <a:endParaRPr lang="en-US" sz="2100"/>
           </a:p>
           <a:p>
             <a:pPr>
@@ -21705,34 +24001,34 @@
               </a:spcAft>
             </a:pPr>
             <a:r>
-              <a:rPr lang="en-US" sz="2100" dirty="0" err="1"/>
+              <a:rPr lang="en-US" sz="2100" err="1"/>
               <a:t>Communicatie</a:t>
             </a:r>
             <a:r>
-              <a:rPr lang="en-US" sz="2100" dirty="0"/>
+              <a:rPr lang="en-US" sz="2100"/>
               <a:t> tool </a:t>
             </a:r>
             <a:r>
-              <a:rPr lang="en-US" sz="2100" dirty="0" err="1"/>
+              <a:rPr lang="en-US" sz="2100" err="1"/>
               <a:t>voor</a:t>
             </a:r>
             <a:r>
-              <a:rPr lang="en-US" sz="2100" dirty="0"/>
+              <a:rPr lang="en-US" sz="2100"/>
               <a:t> </a:t>
             </a:r>
             <a:r>
-              <a:rPr lang="en-US" sz="2100" dirty="0" err="1"/>
+              <a:rPr lang="en-US" sz="2100" err="1"/>
               <a:t>complexe</a:t>
             </a:r>
             <a:r>
-              <a:rPr lang="en-US" sz="2100" dirty="0"/>
+              <a:rPr lang="en-US" sz="2100"/>
               <a:t> design </a:t>
             </a:r>
             <a:r>
-              <a:rPr lang="en-US" sz="2100" dirty="0" err="1"/>
+              <a:rPr lang="en-US" sz="2100" err="1"/>
               <a:t>ideeen</a:t>
             </a:r>
-            <a:endParaRPr lang="en-US" sz="2100" dirty="0"/>
+            <a:endParaRPr lang="en-US" sz="2100"/>
           </a:p>
           <a:p>
             <a:pPr>
@@ -21745,7 +24041,11 @@
             </a:pPr>
             <a:r>
               <a:rPr lang="en-US" sz="2100" dirty="0"/>
-              <a:t>Separation of concerns</a:t>
+              <a:t>Separation</a:t>
+            </a:r>
+            <a:r>
+              <a:rPr lang="en-US" sz="2100"/>
+              <a:t> of concerns</a:t>
             </a:r>
           </a:p>
           <a:p>
@@ -21757,7 +24057,7 @@
                 <a:spcPts val="600"/>
               </a:spcAft>
             </a:pPr>
-            <a:endParaRPr lang="en-US" sz="2100" dirty="0"/>
+            <a:endParaRPr lang="en-US" sz="2100"/>
           </a:p>
           <a:p>
             <a:pPr lvl="1">
@@ -21769,15 +24069,15 @@
               </a:spcAft>
             </a:pPr>
             <a:r>
-              <a:rPr lang="en-US" sz="2100" dirty="0"/>
+              <a:rPr lang="en-US" sz="2100"/>
               <a:t>Creational (</a:t>
             </a:r>
             <a:r>
-              <a:rPr lang="en-US" sz="2100" dirty="0" err="1"/>
+              <a:rPr lang="en-US" sz="2100" err="1"/>
               <a:t>bijv</a:t>
             </a:r>
             <a:r>
-              <a:rPr lang="en-US" sz="2100" dirty="0"/>
+              <a:rPr lang="en-US" sz="2100"/>
               <a:t>. Singleton, builder, factory)</a:t>
             </a:r>
           </a:p>
@@ -21791,15 +24091,15 @@
               </a:spcAft>
             </a:pPr>
             <a:r>
-              <a:rPr lang="en-US" sz="2100" dirty="0"/>
+              <a:rPr lang="en-US" sz="2100"/>
               <a:t>Structural (&lt;= </a:t>
             </a:r>
             <a:r>
-              <a:rPr lang="en-US" sz="2100" dirty="0" err="1"/>
+              <a:rPr lang="en-US" sz="2100" err="1"/>
               <a:t>vandaag</a:t>
             </a:r>
             <a:r>
-              <a:rPr lang="en-US" sz="2100" dirty="0"/>
+              <a:rPr lang="en-US" sz="2100"/>
               <a:t>)</a:t>
             </a:r>
           </a:p>
@@ -21813,7 +24113,7 @@
               </a:spcAft>
             </a:pPr>
             <a:r>
-              <a:rPr lang="en-US" sz="2100" dirty="0"/>
+              <a:rPr lang="en-US" sz="2100"/>
               <a:t>Behavioral (iterator, visitor ..)</a:t>
             </a:r>
           </a:p>
@@ -21856,6 +24156,15 @@
           <a:solidFill>
             <a:srgbClr val="FFFFFF"/>
           </a:solidFill>
+          <a:extLst>
+            <a:ext uri="{909E8E84-426E-40DD-AFC4-6F175D3DCCD1}">
+              <a14:hiddenFill xmlns:a14="http://schemas.microsoft.com/office/drawing/2010/main">
+                <a:solidFill>
+                  <a:srgbClr val="FFFFFF"/>
+                </a:solidFill>
+              </a14:hiddenFill>
+            </a:ext>
+          </a:extLst>
         </p:spPr>
       </p:pic>
       <p:pic>
@@ -24010,6 +26319,15 @@
           <a:solidFill>
             <a:srgbClr val="FFFFFF"/>
           </a:solidFill>
+          <a:extLst>
+            <a:ext uri="{909E8E84-426E-40DD-AFC4-6F175D3DCCD1}">
+              <a14:hiddenFill xmlns:a14="http://schemas.microsoft.com/office/drawing/2010/main">
+                <a:solidFill>
+                  <a:srgbClr val="FFFFFF"/>
+                </a:solidFill>
+              </a14:hiddenFill>
+            </a:ext>
+          </a:extLst>
         </p:spPr>
       </p:pic>
       <p:sp>
@@ -26593,18 +28911,6 @@
 </file>
 
 <file path=customXml/item1.xml><?xml version="1.0" encoding="utf-8"?>
-<p:properties xmlns:p="http://schemas.microsoft.com/office/2006/metadata/properties" xmlns:xsi="http://www.w3.org/2001/XMLSchema-instance" xmlns:pc="http://schemas.microsoft.com/office/infopath/2007/PartnerControls">
-  <documentManagement>
-    <test xmlns="8e39aab0-005d-45b6-a80e-05e5df2908d1" xsi:nil="true"/>
-    <TaxCatchAll xmlns="cc018f0f-33de-4c4c-920d-26dc6e1acc33" xsi:nil="true"/>
-    <lcf76f155ced4ddcb4097134ff3c332f xmlns="8e39aab0-005d-45b6-a80e-05e5df2908d1">
-      <Terms xmlns="http://schemas.microsoft.com/office/infopath/2007/PartnerControls"/>
-    </lcf76f155ced4ddcb4097134ff3c332f>
-  </documentManagement>
-</p:properties>
-</file>
-
-<file path=customXml/item2.xml><?xml version="1.0" encoding="utf-8"?>
 <ct:contentTypeSchema xmlns:ct="http://schemas.microsoft.com/office/2006/metadata/contentType" xmlns:ma="http://schemas.microsoft.com/office/2006/metadata/properties/metaAttributes" ct:_="" ma:_="" ma:contentTypeName="Document" ma:contentTypeID="0x01010081A80706761E274FBF7207A6EEFD509E" ma:contentTypeVersion="20" ma:contentTypeDescription="Een nieuw document maken." ma:contentTypeScope="" ma:versionID="a00a05fe2e076f083d323378c5165ffd">
   <xsd:schema xmlns:xsd="http://www.w3.org/2001/XMLSchema" xmlns:xs="http://www.w3.org/2001/XMLSchema" xmlns:p="http://schemas.microsoft.com/office/2006/metadata/properties" xmlns:ns2="8e39aab0-005d-45b6-a80e-05e5df2908d1" xmlns:ns3="cc018f0f-33de-4c4c-920d-26dc6e1acc33" targetNamespace="http://schemas.microsoft.com/office/2006/metadata/properties" ma:root="true" ma:fieldsID="64bb212a3759e4adb139958771eb6e76" ns2:_="" ns3:_="">
     <xsd:import namespace="8e39aab0-005d-45b6-a80e-05e5df2908d1"/>
@@ -26867,6 +29173,18 @@
 </ct:contentTypeSchema>
 </file>
 
+<file path=customXml/item2.xml><?xml version="1.0" encoding="utf-8"?>
+<p:properties xmlns:p="http://schemas.microsoft.com/office/2006/metadata/properties" xmlns:xsi="http://www.w3.org/2001/XMLSchema-instance" xmlns:pc="http://schemas.microsoft.com/office/infopath/2007/PartnerControls">
+  <documentManagement>
+    <test xmlns="8e39aab0-005d-45b6-a80e-05e5df2908d1" xsi:nil="true"/>
+    <TaxCatchAll xmlns="cc018f0f-33de-4c4c-920d-26dc6e1acc33" xsi:nil="true"/>
+    <lcf76f155ced4ddcb4097134ff3c332f xmlns="8e39aab0-005d-45b6-a80e-05e5df2908d1">
+      <Terms xmlns="http://schemas.microsoft.com/office/infopath/2007/PartnerControls"/>
+    </lcf76f155ced4ddcb4097134ff3c332f>
+  </documentManagement>
+</p:properties>
+</file>
+
 <file path=customXml/item3.xml><?xml version="1.0" encoding="utf-8"?>
 <?mso-contentType ?>
 <FormTemplates xmlns="http://schemas.microsoft.com/sharepoint/v3/contenttype/forms">
@@ -26877,23 +29195,6 @@
 </file>
 
 <file path=customXml/itemProps1.xml><?xml version="1.0" encoding="utf-8"?>
-<ds:datastoreItem xmlns:ds="http://schemas.openxmlformats.org/officeDocument/2006/customXml" ds:itemID="{E7163BBA-5F84-4F76-A7C6-0E4D63C0C7EA}">
-  <ds:schemaRefs>
-    <ds:schemaRef ds:uri="http://schemas.openxmlformats.org/package/2006/metadata/core-properties"/>
-    <ds:schemaRef ds:uri="http://purl.org/dc/dcmitype/"/>
-    <ds:schemaRef ds:uri="http://purl.org/dc/terms/"/>
-    <ds:schemaRef ds:uri="http://purl.org/dc/elements/1.1/"/>
-    <ds:schemaRef ds:uri="http://www.w3.org/XML/1998/namespace"/>
-    <ds:schemaRef ds:uri="8e39aab0-005d-45b6-a80e-05e5df2908d1"/>
-    <ds:schemaRef ds:uri="http://schemas.microsoft.com/office/2006/documentManagement/types"/>
-    <ds:schemaRef ds:uri="http://schemas.microsoft.com/office/infopath/2007/PartnerControls"/>
-    <ds:schemaRef ds:uri="cc018f0f-33de-4c4c-920d-26dc6e1acc33"/>
-    <ds:schemaRef ds:uri="http://schemas.microsoft.com/office/2006/metadata/properties"/>
-  </ds:schemaRefs>
-</ds:datastoreItem>
-</file>
-
-<file path=customXml/itemProps2.xml><?xml version="1.0" encoding="utf-8"?>
 <ds:datastoreItem xmlns:ds="http://schemas.openxmlformats.org/officeDocument/2006/customXml" ds:itemID="{DC000838-A29E-443D-BF31-A8289B8A58CF}">
   <ds:schemaRefs>
     <ds:schemaRef ds:uri="http://schemas.microsoft.com/office/2006/metadata/contentType"/>
@@ -26912,6 +29213,23 @@
 </ds:datastoreItem>
 </file>
 
+<file path=customXml/itemProps2.xml><?xml version="1.0" encoding="utf-8"?>
+<ds:datastoreItem xmlns:ds="http://schemas.openxmlformats.org/officeDocument/2006/customXml" ds:itemID="{E7163BBA-5F84-4F76-A7C6-0E4D63C0C7EA}">
+  <ds:schemaRefs>
+    <ds:schemaRef ds:uri="http://schemas.openxmlformats.org/package/2006/metadata/core-properties"/>
+    <ds:schemaRef ds:uri="http://purl.org/dc/dcmitype/"/>
+    <ds:schemaRef ds:uri="http://purl.org/dc/terms/"/>
+    <ds:schemaRef ds:uri="http://purl.org/dc/elements/1.1/"/>
+    <ds:schemaRef ds:uri="http://www.w3.org/XML/1998/namespace"/>
+    <ds:schemaRef ds:uri="8e39aab0-005d-45b6-a80e-05e5df2908d1"/>
+    <ds:schemaRef ds:uri="http://schemas.microsoft.com/office/2006/documentManagement/types"/>
+    <ds:schemaRef ds:uri="http://schemas.microsoft.com/office/infopath/2007/PartnerControls"/>
+    <ds:schemaRef ds:uri="cc018f0f-33de-4c4c-920d-26dc6e1acc33"/>
+    <ds:schemaRef ds:uri="http://schemas.microsoft.com/office/2006/metadata/properties"/>
+  </ds:schemaRefs>
+</ds:datastoreItem>
+</file>
+
 <file path=customXml/itemProps3.xml><?xml version="1.0" encoding="utf-8"?>
 <ds:datastoreItem xmlns:ds="http://schemas.openxmlformats.org/officeDocument/2006/customXml" ds:itemID="{2EA12E90-AB8E-4722-847F-197088183E8B}">
   <ds:schemaRefs>
